--- a/make_presentation/templates/templates/flow/no_logo_8.pptx
+++ b/make_presentation/templates/templates/flow/no_logo_8.pptx
@@ -67,20 +67,17 @@
             <a:noAutofit/>
           </a:bodyPr>
           <a:p>
-            <a:r>
-              <a:rPr b="0" lang="en-US" sz="1800" spc="-1" strike="noStrike">
-                <a:solidFill>
-                  <a:srgbClr val="000000"/>
-                </a:solidFill>
-                <a:latin typeface="Calibri"/>
-              </a:rPr>
-              <a:t>Для перемещения страницы щёлкните мышью</a:t>
-            </a:r>
-            <a:endParaRPr b="0" lang="en-US" sz="1800" spc="-1" strike="noStrike">
-              <a:solidFill>
-                <a:srgbClr val="000000"/>
-              </a:solidFill>
-              <a:latin typeface="Calibri"/>
+            <a:pPr algn="ctr">
+              <a:buNone/>
+            </a:pPr>
+            <a:r>
+              <a:rPr b="0" lang="en-US" sz="4400" spc="-1" strike="noStrike">
+                <a:latin typeface="Arial"/>
+              </a:rPr>
+              <a:t>Click to move the slide</a:t>
+            </a:r>
+            <a:endParaRPr b="0" lang="en-US" sz="4400" spc="-1" strike="noStrike">
+              <a:latin typeface="Arial"/>
             </a:endParaRPr>
           </a:p>
         </p:txBody>
@@ -114,12 +111,12 @@
           </a:bodyPr>
           <a:p>
             <a:r>
-              <a:rPr b="0" lang="ru-RU" sz="2000" spc="-1" strike="noStrike">
+              <a:rPr b="0" lang="en-US" sz="2000" spc="-1" strike="noStrike">
                 <a:latin typeface="Arial"/>
               </a:rPr>
-              <a:t>Для правки формата примечаний щёлкните мышью</a:t>
-            </a:r>
-            <a:endParaRPr b="0" lang="ru-RU" sz="2000" spc="-1" strike="noStrike">
+              <a:t>Click to edit the notes format</a:t>
+            </a:r>
+            <a:endParaRPr b="0" lang="en-US" sz="2000" spc="-1" strike="noStrike">
               <a:latin typeface="Arial"/>
             </a:endParaRPr>
           </a:p>
@@ -154,12 +151,12 @@
           </a:bodyPr>
           <a:p>
             <a:r>
-              <a:rPr b="0" lang="ru-RU" sz="1400" spc="-1" strike="noStrike">
+              <a:rPr b="0" lang="en-US" sz="1400" spc="-1" strike="noStrike">
                 <a:latin typeface="Times New Roman"/>
               </a:rPr>
-              <a:t>&lt;верхний колонтитул&gt;</a:t>
-            </a:r>
-            <a:endParaRPr b="0" lang="ru-RU" sz="1400" spc="-1" strike="noStrike">
+              <a:t>&lt;header&gt;</a:t>
+            </a:r>
+            <a:endParaRPr b="0" lang="en-US" sz="1400" spc="-1" strike="noStrike">
               <a:latin typeface="Times New Roman"/>
             </a:endParaRPr>
           </a:p>
@@ -195,7 +192,7 @@
           <a:lstStyle>
             <a:lvl1pPr algn="r">
               <a:buNone/>
-              <a:defRPr b="0" lang="ru-RU" sz="1400" spc="-1" strike="noStrike">
+              <a:defRPr b="0" lang="en-US" sz="1400" spc="-1" strike="noStrike">
                 <a:latin typeface="Times New Roman"/>
               </a:defRPr>
             </a:lvl1pPr>
@@ -205,12 +202,12 @@
               <a:buNone/>
             </a:pPr>
             <a:r>
-              <a:rPr b="0" lang="ru-RU" sz="1400" spc="-1" strike="noStrike">
+              <a:rPr b="0" lang="en-US" sz="1400" spc="-1" strike="noStrike">
                 <a:latin typeface="Times New Roman"/>
               </a:rPr>
-              <a:t>&lt;дата/время&gt;</a:t>
-            </a:r>
-            <a:endParaRPr b="0" lang="ru-RU" sz="1400" spc="-1" strike="noStrike">
+              <a:t>&lt;date/time&gt;</a:t>
+            </a:r>
+            <a:endParaRPr b="0" lang="en-US" sz="1400" spc="-1" strike="noStrike">
               <a:latin typeface="Times New Roman"/>
             </a:endParaRPr>
           </a:p>
@@ -245,19 +242,19 @@
           </a:bodyPr>
           <a:lstStyle>
             <a:lvl1pPr>
-              <a:defRPr b="0" lang="ru-RU" sz="1400" spc="-1" strike="noStrike">
+              <a:defRPr b="0" lang="en-US" sz="1400" spc="-1" strike="noStrike">
                 <a:latin typeface="Times New Roman"/>
               </a:defRPr>
             </a:lvl1pPr>
           </a:lstStyle>
           <a:p>
             <a:r>
-              <a:rPr b="0" lang="ru-RU" sz="1400" spc="-1" strike="noStrike">
+              <a:rPr b="0" lang="en-US" sz="1400" spc="-1" strike="noStrike">
                 <a:latin typeface="Times New Roman"/>
               </a:rPr>
-              <a:t>&lt;нижний колонтитул&gt;</a:t>
-            </a:r>
-            <a:endParaRPr b="0" lang="ru-RU" sz="1400" spc="-1" strike="noStrike">
+              <a:t>&lt;footer&gt;</a:t>
+            </a:r>
+            <a:endParaRPr b="0" lang="en-US" sz="1400" spc="-1" strike="noStrike">
               <a:latin typeface="Times New Roman"/>
             </a:endParaRPr>
           </a:p>
@@ -293,7 +290,7 @@
           <a:lstStyle>
             <a:lvl1pPr algn="r">
               <a:buNone/>
-              <a:defRPr b="0" lang="ru-RU" sz="1400" spc="-1" strike="noStrike">
+              <a:defRPr b="0" lang="en-US" sz="1400" spc="-1" strike="noStrike">
                 <a:latin typeface="Times New Roman"/>
               </a:defRPr>
             </a:lvl1pPr>
@@ -302,13 +299,13 @@
             <a:pPr algn="r">
               <a:buNone/>
             </a:pPr>
-            <a:fld id="{33C7FC1E-AD70-4030-87E3-B565D04F3C4D}" type="slidenum">
-              <a:rPr b="0" lang="ru-RU" sz="1400" spc="-1" strike="noStrike">
+            <a:fld id="{8748D3F0-7F92-4C29-ADAA-EAC9DEBDA8B5}" type="slidenum">
+              <a:rPr b="0" lang="en-US" sz="1400" spc="-1" strike="noStrike">
                 <a:latin typeface="Times New Roman"/>
               </a:rPr>
-              <a:t>&lt;номер&gt;</a:t>
+              <a:t>&lt;number&gt;</a:t>
             </a:fld>
-            <a:endParaRPr b="0" lang="ru-RU" sz="1400" spc="-1" strike="noStrike">
+            <a:endParaRPr b="0" lang="en-US" sz="1400" spc="-1" strike="noStrike">
               <a:latin typeface="Times New Roman"/>
             </a:endParaRPr>
           </a:p>
@@ -339,7 +336,7 @@
       </p:grpSpPr>
       <p:sp>
         <p:nvSpPr>
-          <p:cNvPr id="124" name="PlaceHolder 1"/>
+          <p:cNvPr id="123" name="PlaceHolder 1"/>
           <p:cNvSpPr>
             <a:spLocks noGrp="1"/>
           </p:cNvSpPr>
@@ -350,19 +347,19 @@
         <p:spPr>
           <a:xfrm>
             <a:off x="685800" y="1143000"/>
-            <a:ext cx="5486040" cy="3085920"/>
-          </a:xfrm>
-          <a:prstGeom prst="rect">
-            <a:avLst/>
-          </a:prstGeom>
-          <a:ln w="0">
-            <a:noFill/>
-          </a:ln>
-        </p:spPr>
-      </p:sp>
-      <p:sp>
-        <p:nvSpPr>
-          <p:cNvPr id="125" name="PlaceHolder 2"/>
+            <a:ext cx="5485680" cy="3085560"/>
+          </a:xfrm>
+          <a:prstGeom prst="rect">
+            <a:avLst/>
+          </a:prstGeom>
+          <a:ln w="0">
+            <a:noFill/>
+          </a:ln>
+        </p:spPr>
+      </p:sp>
+      <p:sp>
+        <p:nvSpPr>
+          <p:cNvPr id="124" name="PlaceHolder 2"/>
           <p:cNvSpPr>
             <a:spLocks noGrp="1"/>
           </p:cNvSpPr>
@@ -373,30 +370,30 @@
         <p:spPr>
           <a:xfrm>
             <a:off x="685800" y="4400640"/>
-            <a:ext cx="5486040" cy="3600000"/>
-          </a:xfrm>
-          <a:prstGeom prst="rect">
-            <a:avLst/>
-          </a:prstGeom>
-          <a:noFill/>
-          <a:ln w="0">
-            <a:noFill/>
-          </a:ln>
-        </p:spPr>
-        <p:txBody>
-          <a:bodyPr anchor="t">
-            <a:noAutofit/>
-          </a:bodyPr>
-          <a:p>
-            <a:endParaRPr b="0" lang="ru-RU" sz="2000" spc="-1" strike="noStrike">
-              <a:latin typeface="Arial"/>
-            </a:endParaRPr>
-          </a:p>
-        </p:txBody>
-      </p:sp>
-      <p:sp>
-        <p:nvSpPr>
-          <p:cNvPr id="126" name="PlaceHolder 3"/>
+            <a:ext cx="5485680" cy="3599640"/>
+          </a:xfrm>
+          <a:prstGeom prst="rect">
+            <a:avLst/>
+          </a:prstGeom>
+          <a:noFill/>
+          <a:ln w="0">
+            <a:noFill/>
+          </a:ln>
+        </p:spPr>
+        <p:txBody>
+          <a:bodyPr lIns="0" rIns="0" tIns="0" bIns="0" anchor="t">
+            <a:noAutofit/>
+          </a:bodyPr>
+          <a:p>
+            <a:endParaRPr b="0" lang="en-US" sz="2000" spc="-1" strike="noStrike">
+              <a:latin typeface="Arial"/>
+            </a:endParaRPr>
+          </a:p>
+        </p:txBody>
+      </p:sp>
+      <p:sp>
+        <p:nvSpPr>
+          <p:cNvPr id="125" name="PlaceHolder 3"/>
           <p:cNvSpPr>
             <a:spLocks noGrp="1"/>
           </p:cNvSpPr>
@@ -407,18 +404,18 @@
         <p:spPr>
           <a:xfrm>
             <a:off x="3884760" y="8685360"/>
-            <a:ext cx="2971440" cy="458280"/>
-          </a:xfrm>
-          <a:prstGeom prst="rect">
-            <a:avLst/>
-          </a:prstGeom>
-          <a:noFill/>
-          <a:ln w="0">
-            <a:noFill/>
-          </a:ln>
-        </p:spPr>
-        <p:txBody>
-          <a:bodyPr anchor="b">
+            <a:ext cx="2971080" cy="457920"/>
+          </a:xfrm>
+          <a:prstGeom prst="rect">
+            <a:avLst/>
+          </a:prstGeom>
+          <a:noFill/>
+          <a:ln w="0">
+            <a:noFill/>
+          </a:ln>
+        </p:spPr>
+        <p:txBody>
+          <a:bodyPr lIns="0" rIns="0" tIns="0" bIns="0" anchor="b">
             <a:noAutofit/>
           </a:bodyPr>
           <a:lstStyle>
@@ -439,13 +436,13 @@
               </a:lnSpc>
               <a:buNone/>
             </a:pPr>
-            <a:fld id="{4E202B44-7F09-4BCB-B2A3-8ABE31B0DCE6}" type="slidenum">
+            <a:fld id="{E32EC61A-04D4-4F80-AC48-FDCF9A947318}" type="slidenum">
               <a:rPr b="0" lang="ru-RU" sz="1200" spc="-1" strike="noStrike">
                 <a:latin typeface="Times New Roman"/>
               </a:rPr>
-              <a:t>&lt;номер&gt;</a:t>
+              <a:t>&lt;number&gt;</a:t>
             </a:fld>
-            <a:endParaRPr b="0" lang="ru-RU" sz="1200" spc="-1" strike="noStrike">
+            <a:endParaRPr b="0" lang="en-US" sz="1200" spc="-1" strike="noStrike">
               <a:latin typeface="Times New Roman"/>
             </a:endParaRPr>
           </a:p>
@@ -475,7 +472,7 @@
       </p:grpSpPr>
       <p:sp>
         <p:nvSpPr>
-          <p:cNvPr id="127" name="PlaceHolder 1"/>
+          <p:cNvPr id="126" name="PlaceHolder 1"/>
           <p:cNvSpPr>
             <a:spLocks noGrp="1"/>
           </p:cNvSpPr>
@@ -486,19 +483,19 @@
         <p:spPr>
           <a:xfrm>
             <a:off x="685800" y="1143000"/>
-            <a:ext cx="5486040" cy="3085920"/>
-          </a:xfrm>
-          <a:prstGeom prst="rect">
-            <a:avLst/>
-          </a:prstGeom>
-          <a:ln w="0">
-            <a:noFill/>
-          </a:ln>
-        </p:spPr>
-      </p:sp>
-      <p:sp>
-        <p:nvSpPr>
-          <p:cNvPr id="128" name="PlaceHolder 2"/>
+            <a:ext cx="5485680" cy="3085560"/>
+          </a:xfrm>
+          <a:prstGeom prst="rect">
+            <a:avLst/>
+          </a:prstGeom>
+          <a:ln w="0">
+            <a:noFill/>
+          </a:ln>
+        </p:spPr>
+      </p:sp>
+      <p:sp>
+        <p:nvSpPr>
+          <p:cNvPr id="127" name="PlaceHolder 2"/>
           <p:cNvSpPr>
             <a:spLocks noGrp="1"/>
           </p:cNvSpPr>
@@ -509,30 +506,30 @@
         <p:spPr>
           <a:xfrm>
             <a:off x="685800" y="4400640"/>
-            <a:ext cx="5486040" cy="3600000"/>
-          </a:xfrm>
-          <a:prstGeom prst="rect">
-            <a:avLst/>
-          </a:prstGeom>
-          <a:noFill/>
-          <a:ln w="0">
-            <a:noFill/>
-          </a:ln>
-        </p:spPr>
-        <p:txBody>
-          <a:bodyPr anchor="t">
-            <a:noAutofit/>
-          </a:bodyPr>
-          <a:p>
-            <a:endParaRPr b="0" lang="ru-RU" sz="2000" spc="-1" strike="noStrike">
-              <a:latin typeface="Arial"/>
-            </a:endParaRPr>
-          </a:p>
-        </p:txBody>
-      </p:sp>
-      <p:sp>
-        <p:nvSpPr>
-          <p:cNvPr id="129" name="PlaceHolder 3"/>
+            <a:ext cx="5485680" cy="3599640"/>
+          </a:xfrm>
+          <a:prstGeom prst="rect">
+            <a:avLst/>
+          </a:prstGeom>
+          <a:noFill/>
+          <a:ln w="0">
+            <a:noFill/>
+          </a:ln>
+        </p:spPr>
+        <p:txBody>
+          <a:bodyPr lIns="0" rIns="0" tIns="0" bIns="0" anchor="t">
+            <a:noAutofit/>
+          </a:bodyPr>
+          <a:p>
+            <a:endParaRPr b="0" lang="en-US" sz="2000" spc="-1" strike="noStrike">
+              <a:latin typeface="Arial"/>
+            </a:endParaRPr>
+          </a:p>
+        </p:txBody>
+      </p:sp>
+      <p:sp>
+        <p:nvSpPr>
+          <p:cNvPr id="128" name="PlaceHolder 3"/>
           <p:cNvSpPr>
             <a:spLocks noGrp="1"/>
           </p:cNvSpPr>
@@ -543,18 +540,18 @@
         <p:spPr>
           <a:xfrm>
             <a:off x="3884760" y="8685360"/>
-            <a:ext cx="2971440" cy="458280"/>
-          </a:xfrm>
-          <a:prstGeom prst="rect">
-            <a:avLst/>
-          </a:prstGeom>
-          <a:noFill/>
-          <a:ln w="0">
-            <a:noFill/>
-          </a:ln>
-        </p:spPr>
-        <p:txBody>
-          <a:bodyPr anchor="b">
+            <a:ext cx="2971080" cy="457920"/>
+          </a:xfrm>
+          <a:prstGeom prst="rect">
+            <a:avLst/>
+          </a:prstGeom>
+          <a:noFill/>
+          <a:ln w="0">
+            <a:noFill/>
+          </a:ln>
+        </p:spPr>
+        <p:txBody>
+          <a:bodyPr lIns="0" rIns="0" tIns="0" bIns="0" anchor="b">
             <a:noAutofit/>
           </a:bodyPr>
           <a:lstStyle>
@@ -575,13 +572,13 @@
               </a:lnSpc>
               <a:buNone/>
             </a:pPr>
-            <a:fld id="{867034A9-332B-4186-978B-1DD065734A57}" type="slidenum">
+            <a:fld id="{22185F01-7B1C-40BB-9F1F-E09333B6CB30}" type="slidenum">
               <a:rPr b="0" lang="ru-RU" sz="1200" spc="-1" strike="noStrike">
                 <a:latin typeface="Times New Roman"/>
               </a:rPr>
-              <a:t>&lt;номер&gt;</a:t>
+              <a:t>&lt;number&gt;</a:t>
             </a:fld>
-            <a:endParaRPr b="0" lang="ru-RU" sz="1200" spc="-1" strike="noStrike">
+            <a:endParaRPr b="0" lang="en-US" sz="1200" spc="-1" strike="noStrike">
               <a:latin typeface="Times New Roman"/>
             </a:endParaRPr>
           </a:p>
@@ -616,7 +613,7 @@
             <a:spLocks noGrp="1"/>
           </p:cNvSpPr>
           <p:nvPr>
-            <p:ph type="ftr" idx="2"/>
+            <p:ph type="ftr" idx="1"/>
           </p:nvPr>
         </p:nvSpPr>
         <p:spPr/>
@@ -636,14 +633,14 @@
             <a:spLocks noGrp="1"/>
           </p:cNvSpPr>
           <p:nvPr>
-            <p:ph type="sldNum" idx="3"/>
+            <p:ph type="sldNum" idx="2"/>
           </p:nvPr>
         </p:nvSpPr>
         <p:spPr/>
         <p:txBody>
           <a:bodyPr/>
           <a:p>
-            <a:fld id="{605F1BE5-A53B-40FD-9476-FDB0A8F9BC27}" type="slidenum">
+            <a:fld id="{DAB7E06E-735B-4240-9E3C-EC7415868DAA}" type="slidenum">
               <a:t>&lt;#&gt;</a:t>
             </a:fld>
           </a:p>
@@ -656,7 +653,7 @@
             <a:spLocks noGrp="1"/>
           </p:cNvSpPr>
           <p:nvPr>
-            <p:ph type="dt" idx="1"/>
+            <p:ph type="dt" idx="3"/>
           </p:nvPr>
         </p:nvSpPr>
         <p:spPr/>
@@ -664,7 +661,7 @@
           <a:bodyPr/>
           <a:p>
             <a:r>
-              <a:rPr lang="ru-RU"/>
+              <a:rPr lang="en-US"/>
               <a:t/>
             </a:r>
           </a:p>
@@ -705,7 +702,7 @@
         <p:spPr>
           <a:xfrm>
             <a:off x="1143000" y="841680"/>
-            <a:ext cx="6857640" cy="1790280"/>
+            <a:ext cx="6857280" cy="1789920"/>
           </a:xfrm>
           <a:prstGeom prst="rect">
             <a:avLst/>
@@ -720,11 +717,11 @@
             <a:noAutofit/>
           </a:bodyPr>
           <a:p>
-            <a:endParaRPr b="0" lang="en-US" sz="1800" spc="-1" strike="noStrike">
-              <a:solidFill>
-                <a:srgbClr val="000000"/>
-              </a:solidFill>
-              <a:latin typeface="Calibri"/>
+            <a:pPr algn="ctr">
+              <a:buNone/>
+            </a:pPr>
+            <a:endParaRPr b="0" lang="en-US" sz="4400" spc="-1" strike="noStrike">
+              <a:latin typeface="Arial"/>
             </a:endParaRPr>
           </a:p>
         </p:txBody>
@@ -757,20 +754,8 @@
             <a:normAutofit/>
           </a:bodyPr>
           <a:p>
-            <a:pPr>
-              <a:lnSpc>
-                <a:spcPct val="90000"/>
-              </a:lnSpc>
-              <a:spcBef>
-                <a:spcPts val="1417"/>
-              </a:spcBef>
-              <a:buNone/>
-            </a:pPr>
-            <a:endParaRPr b="0" lang="en-US" sz="2100" spc="-1" strike="noStrike">
-              <a:solidFill>
-                <a:srgbClr val="000000"/>
-              </a:solidFill>
-              <a:latin typeface="Calibri"/>
+            <a:endParaRPr b="0" lang="en-US" sz="3200" spc="-1" strike="noStrike">
+              <a:latin typeface="Arial"/>
             </a:endParaRPr>
           </a:p>
         </p:txBody>
@@ -803,20 +788,8 @@
             <a:normAutofit/>
           </a:bodyPr>
           <a:p>
-            <a:pPr>
-              <a:lnSpc>
-                <a:spcPct val="90000"/>
-              </a:lnSpc>
-              <a:spcBef>
-                <a:spcPts val="1417"/>
-              </a:spcBef>
-              <a:buNone/>
-            </a:pPr>
-            <a:endParaRPr b="0" lang="en-US" sz="2100" spc="-1" strike="noStrike">
-              <a:solidFill>
-                <a:srgbClr val="000000"/>
-              </a:solidFill>
-              <a:latin typeface="Calibri"/>
+            <a:endParaRPr b="0" lang="en-US" sz="3200" spc="-1" strike="noStrike">
+              <a:latin typeface="Arial"/>
             </a:endParaRPr>
           </a:p>
         </p:txBody>
@@ -828,7 +801,7 @@
             <a:spLocks noGrp="1"/>
           </p:cNvSpPr>
           <p:nvPr>
-            <p:ph type="ftr" idx="2"/>
+            <p:ph type="ftr" idx="1"/>
           </p:nvPr>
         </p:nvSpPr>
         <p:spPr/>
@@ -848,14 +821,14 @@
             <a:spLocks noGrp="1"/>
           </p:cNvSpPr>
           <p:nvPr>
-            <p:ph type="sldNum" idx="3"/>
+            <p:ph type="sldNum" idx="2"/>
           </p:nvPr>
         </p:nvSpPr>
         <p:spPr/>
         <p:txBody>
           <a:bodyPr/>
           <a:p>
-            <a:fld id="{5477310B-FB23-4B38-B5C5-6FC81ED43EA3}" type="slidenum">
+            <a:fld id="{3A6FB94B-0701-414C-9AD3-0CEBF3FDBA30}" type="slidenum">
               <a:t>&lt;#&gt;</a:t>
             </a:fld>
           </a:p>
@@ -868,7 +841,7 @@
             <a:spLocks noGrp="1"/>
           </p:cNvSpPr>
           <p:nvPr>
-            <p:ph type="dt" idx="1"/>
+            <p:ph type="dt" idx="3"/>
           </p:nvPr>
         </p:nvSpPr>
         <p:spPr/>
@@ -876,7 +849,7 @@
           <a:bodyPr/>
           <a:p>
             <a:r>
-              <a:rPr lang="ru-RU"/>
+              <a:rPr lang="en-US"/>
               <a:t/>
             </a:r>
           </a:p>
@@ -917,7 +890,7 @@
         <p:spPr>
           <a:xfrm>
             <a:off x="1143000" y="841680"/>
-            <a:ext cx="6857640" cy="1790280"/>
+            <a:ext cx="6857280" cy="1789920"/>
           </a:xfrm>
           <a:prstGeom prst="rect">
             <a:avLst/>
@@ -932,11 +905,11 @@
             <a:noAutofit/>
           </a:bodyPr>
           <a:p>
-            <a:endParaRPr b="0" lang="en-US" sz="1800" spc="-1" strike="noStrike">
-              <a:solidFill>
-                <a:srgbClr val="000000"/>
-              </a:solidFill>
-              <a:latin typeface="Calibri"/>
+            <a:pPr algn="ctr">
+              <a:buNone/>
+            </a:pPr>
+            <a:endParaRPr b="0" lang="en-US" sz="4400" spc="-1" strike="noStrike">
+              <a:latin typeface="Arial"/>
             </a:endParaRPr>
           </a:p>
         </p:txBody>
@@ -969,20 +942,8 @@
             <a:normAutofit/>
           </a:bodyPr>
           <a:p>
-            <a:pPr>
-              <a:lnSpc>
-                <a:spcPct val="90000"/>
-              </a:lnSpc>
-              <a:spcBef>
-                <a:spcPts val="1417"/>
-              </a:spcBef>
-              <a:buNone/>
-            </a:pPr>
-            <a:endParaRPr b="0" lang="en-US" sz="2100" spc="-1" strike="noStrike">
-              <a:solidFill>
-                <a:srgbClr val="000000"/>
-              </a:solidFill>
-              <a:latin typeface="Calibri"/>
+            <a:endParaRPr b="0" lang="en-US" sz="3200" spc="-1" strike="noStrike">
+              <a:latin typeface="Arial"/>
             </a:endParaRPr>
           </a:p>
         </p:txBody>
@@ -1015,20 +976,8 @@
             <a:normAutofit/>
           </a:bodyPr>
           <a:p>
-            <a:pPr>
-              <a:lnSpc>
-                <a:spcPct val="90000"/>
-              </a:lnSpc>
-              <a:spcBef>
-                <a:spcPts val="1417"/>
-              </a:spcBef>
-              <a:buNone/>
-            </a:pPr>
-            <a:endParaRPr b="0" lang="en-US" sz="2100" spc="-1" strike="noStrike">
-              <a:solidFill>
-                <a:srgbClr val="000000"/>
-              </a:solidFill>
-              <a:latin typeface="Calibri"/>
+            <a:endParaRPr b="0" lang="en-US" sz="3200" spc="-1" strike="noStrike">
+              <a:latin typeface="Arial"/>
             </a:endParaRPr>
           </a:p>
         </p:txBody>
@@ -1061,20 +1010,8 @@
             <a:normAutofit/>
           </a:bodyPr>
           <a:p>
-            <a:pPr>
-              <a:lnSpc>
-                <a:spcPct val="90000"/>
-              </a:lnSpc>
-              <a:spcBef>
-                <a:spcPts val="1417"/>
-              </a:spcBef>
-              <a:buNone/>
-            </a:pPr>
-            <a:endParaRPr b="0" lang="en-US" sz="2100" spc="-1" strike="noStrike">
-              <a:solidFill>
-                <a:srgbClr val="000000"/>
-              </a:solidFill>
-              <a:latin typeface="Calibri"/>
+            <a:endParaRPr b="0" lang="en-US" sz="3200" spc="-1" strike="noStrike">
+              <a:latin typeface="Arial"/>
             </a:endParaRPr>
           </a:p>
         </p:txBody>
@@ -1107,20 +1044,8 @@
             <a:normAutofit/>
           </a:bodyPr>
           <a:p>
-            <a:pPr>
-              <a:lnSpc>
-                <a:spcPct val="90000"/>
-              </a:lnSpc>
-              <a:spcBef>
-                <a:spcPts val="1417"/>
-              </a:spcBef>
-              <a:buNone/>
-            </a:pPr>
-            <a:endParaRPr b="0" lang="en-US" sz="2100" spc="-1" strike="noStrike">
-              <a:solidFill>
-                <a:srgbClr val="000000"/>
-              </a:solidFill>
-              <a:latin typeface="Calibri"/>
+            <a:endParaRPr b="0" lang="en-US" sz="3200" spc="-1" strike="noStrike">
+              <a:latin typeface="Arial"/>
             </a:endParaRPr>
           </a:p>
         </p:txBody>
@@ -1132,7 +1057,7 @@
             <a:spLocks noGrp="1"/>
           </p:cNvSpPr>
           <p:nvPr>
-            <p:ph type="ftr" idx="2"/>
+            <p:ph type="ftr" idx="1"/>
           </p:nvPr>
         </p:nvSpPr>
         <p:spPr/>
@@ -1152,14 +1077,14 @@
             <a:spLocks noGrp="1"/>
           </p:cNvSpPr>
           <p:nvPr>
-            <p:ph type="sldNum" idx="3"/>
+            <p:ph type="sldNum" idx="2"/>
           </p:nvPr>
         </p:nvSpPr>
         <p:spPr/>
         <p:txBody>
           <a:bodyPr/>
           <a:p>
-            <a:fld id="{1785C28E-3F2C-401A-BB5C-32CA2886FA78}" type="slidenum">
+            <a:fld id="{B37EFD35-722F-40F0-AADB-7DA863EB93B8}" type="slidenum">
               <a:t>&lt;#&gt;</a:t>
             </a:fld>
           </a:p>
@@ -1172,7 +1097,7 @@
             <a:spLocks noGrp="1"/>
           </p:cNvSpPr>
           <p:nvPr>
-            <p:ph type="dt" idx="1"/>
+            <p:ph type="dt" idx="3"/>
           </p:nvPr>
         </p:nvSpPr>
         <p:spPr/>
@@ -1180,7 +1105,7 @@
           <a:bodyPr/>
           <a:p>
             <a:r>
-              <a:rPr lang="ru-RU"/>
+              <a:rPr lang="en-US"/>
               <a:t/>
             </a:r>
           </a:p>
@@ -1221,7 +1146,7 @@
         <p:spPr>
           <a:xfrm>
             <a:off x="1143000" y="841680"/>
-            <a:ext cx="6857640" cy="1790280"/>
+            <a:ext cx="6857280" cy="1789920"/>
           </a:xfrm>
           <a:prstGeom prst="rect">
             <a:avLst/>
@@ -1236,11 +1161,11 @@
             <a:noAutofit/>
           </a:bodyPr>
           <a:p>
-            <a:endParaRPr b="0" lang="en-US" sz="1800" spc="-1" strike="noStrike">
-              <a:solidFill>
-                <a:srgbClr val="000000"/>
-              </a:solidFill>
-              <a:latin typeface="Calibri"/>
+            <a:pPr algn="ctr">
+              <a:buNone/>
+            </a:pPr>
+            <a:endParaRPr b="0" lang="en-US" sz="4400" spc="-1" strike="noStrike">
+              <a:latin typeface="Arial"/>
             </a:endParaRPr>
           </a:p>
         </p:txBody>
@@ -1273,20 +1198,8 @@
             <a:normAutofit/>
           </a:bodyPr>
           <a:p>
-            <a:pPr>
-              <a:lnSpc>
-                <a:spcPct val="90000"/>
-              </a:lnSpc>
-              <a:spcBef>
-                <a:spcPts val="1417"/>
-              </a:spcBef>
-              <a:buNone/>
-            </a:pPr>
-            <a:endParaRPr b="0" lang="en-US" sz="2100" spc="-1" strike="noStrike">
-              <a:solidFill>
-                <a:srgbClr val="000000"/>
-              </a:solidFill>
-              <a:latin typeface="Calibri"/>
+            <a:endParaRPr b="0" lang="en-US" sz="3200" spc="-1" strike="noStrike">
+              <a:latin typeface="Arial"/>
             </a:endParaRPr>
           </a:p>
         </p:txBody>
@@ -1319,20 +1232,8 @@
             <a:normAutofit/>
           </a:bodyPr>
           <a:p>
-            <a:pPr>
-              <a:lnSpc>
-                <a:spcPct val="90000"/>
-              </a:lnSpc>
-              <a:spcBef>
-                <a:spcPts val="1417"/>
-              </a:spcBef>
-              <a:buNone/>
-            </a:pPr>
-            <a:endParaRPr b="0" lang="en-US" sz="2100" spc="-1" strike="noStrike">
-              <a:solidFill>
-                <a:srgbClr val="000000"/>
-              </a:solidFill>
-              <a:latin typeface="Calibri"/>
+            <a:endParaRPr b="0" lang="en-US" sz="3200" spc="-1" strike="noStrike">
+              <a:latin typeface="Arial"/>
             </a:endParaRPr>
           </a:p>
         </p:txBody>
@@ -1365,20 +1266,8 @@
             <a:normAutofit/>
           </a:bodyPr>
           <a:p>
-            <a:pPr>
-              <a:lnSpc>
-                <a:spcPct val="90000"/>
-              </a:lnSpc>
-              <a:spcBef>
-                <a:spcPts val="1417"/>
-              </a:spcBef>
-              <a:buNone/>
-            </a:pPr>
-            <a:endParaRPr b="0" lang="en-US" sz="2100" spc="-1" strike="noStrike">
-              <a:solidFill>
-                <a:srgbClr val="000000"/>
-              </a:solidFill>
-              <a:latin typeface="Calibri"/>
+            <a:endParaRPr b="0" lang="en-US" sz="3200" spc="-1" strike="noStrike">
+              <a:latin typeface="Arial"/>
             </a:endParaRPr>
           </a:p>
         </p:txBody>
@@ -1411,20 +1300,8 @@
             <a:normAutofit/>
           </a:bodyPr>
           <a:p>
-            <a:pPr>
-              <a:lnSpc>
-                <a:spcPct val="90000"/>
-              </a:lnSpc>
-              <a:spcBef>
-                <a:spcPts val="1417"/>
-              </a:spcBef>
-              <a:buNone/>
-            </a:pPr>
-            <a:endParaRPr b="0" lang="en-US" sz="2100" spc="-1" strike="noStrike">
-              <a:solidFill>
-                <a:srgbClr val="000000"/>
-              </a:solidFill>
-              <a:latin typeface="Calibri"/>
+            <a:endParaRPr b="0" lang="en-US" sz="3200" spc="-1" strike="noStrike">
+              <a:latin typeface="Arial"/>
             </a:endParaRPr>
           </a:p>
         </p:txBody>
@@ -1457,20 +1334,8 @@
             <a:normAutofit/>
           </a:bodyPr>
           <a:p>
-            <a:pPr>
-              <a:lnSpc>
-                <a:spcPct val="90000"/>
-              </a:lnSpc>
-              <a:spcBef>
-                <a:spcPts val="1417"/>
-              </a:spcBef>
-              <a:buNone/>
-            </a:pPr>
-            <a:endParaRPr b="0" lang="en-US" sz="2100" spc="-1" strike="noStrike">
-              <a:solidFill>
-                <a:srgbClr val="000000"/>
-              </a:solidFill>
-              <a:latin typeface="Calibri"/>
+            <a:endParaRPr b="0" lang="en-US" sz="3200" spc="-1" strike="noStrike">
+              <a:latin typeface="Arial"/>
             </a:endParaRPr>
           </a:p>
         </p:txBody>
@@ -1503,20 +1368,8 @@
             <a:normAutofit/>
           </a:bodyPr>
           <a:p>
-            <a:pPr>
-              <a:lnSpc>
-                <a:spcPct val="90000"/>
-              </a:lnSpc>
-              <a:spcBef>
-                <a:spcPts val="1417"/>
-              </a:spcBef>
-              <a:buNone/>
-            </a:pPr>
-            <a:endParaRPr b="0" lang="en-US" sz="2100" spc="-1" strike="noStrike">
-              <a:solidFill>
-                <a:srgbClr val="000000"/>
-              </a:solidFill>
-              <a:latin typeface="Calibri"/>
+            <a:endParaRPr b="0" lang="en-US" sz="3200" spc="-1" strike="noStrike">
+              <a:latin typeface="Arial"/>
             </a:endParaRPr>
           </a:p>
         </p:txBody>
@@ -1528,7 +1381,7 @@
             <a:spLocks noGrp="1"/>
           </p:cNvSpPr>
           <p:nvPr>
-            <p:ph type="ftr" idx="2"/>
+            <p:ph type="ftr" idx="1"/>
           </p:nvPr>
         </p:nvSpPr>
         <p:spPr/>
@@ -1548,14 +1401,14 @@
             <a:spLocks noGrp="1"/>
           </p:cNvSpPr>
           <p:nvPr>
-            <p:ph type="sldNum" idx="3"/>
+            <p:ph type="sldNum" idx="2"/>
           </p:nvPr>
         </p:nvSpPr>
         <p:spPr/>
         <p:txBody>
           <a:bodyPr/>
           <a:p>
-            <a:fld id="{1E848465-E482-42B1-BAF3-6E7BE3891E5F}" type="slidenum">
+            <a:fld id="{D2475141-F379-4F76-8EE8-522011684467}" type="slidenum">
               <a:t>&lt;#&gt;</a:t>
             </a:fld>
           </a:p>
@@ -1568,7 +1421,7 @@
             <a:spLocks noGrp="1"/>
           </p:cNvSpPr>
           <p:nvPr>
-            <p:ph type="dt" idx="1"/>
+            <p:ph type="dt" idx="3"/>
           </p:nvPr>
         </p:nvSpPr>
         <p:spPr/>
@@ -1576,7 +1429,7 @@
           <a:bodyPr/>
           <a:p>
             <a:r>
-              <a:rPr lang="ru-RU"/>
+              <a:rPr lang="en-US"/>
               <a:t/>
             </a:r>
           </a:p>
@@ -1617,7 +1470,7 @@
         <p:spPr>
           <a:xfrm>
             <a:off x="1143000" y="841680"/>
-            <a:ext cx="6857640" cy="1790280"/>
+            <a:ext cx="6857280" cy="1789920"/>
           </a:xfrm>
           <a:prstGeom prst="rect">
             <a:avLst/>
@@ -1632,11 +1485,11 @@
             <a:noAutofit/>
           </a:bodyPr>
           <a:p>
-            <a:endParaRPr b="0" lang="en-US" sz="1800" spc="-1" strike="noStrike">
-              <a:solidFill>
-                <a:srgbClr val="000000"/>
-              </a:solidFill>
-              <a:latin typeface="Calibri"/>
+            <a:pPr algn="ctr">
+              <a:buNone/>
+            </a:pPr>
+            <a:endParaRPr b="0" lang="en-US" sz="4400" spc="-1" strike="noStrike">
+              <a:latin typeface="Arial"/>
             </a:endParaRPr>
           </a:p>
         </p:txBody>
@@ -1672,7 +1525,7 @@
             <a:pPr algn="ctr">
               <a:buNone/>
             </a:pPr>
-            <a:endParaRPr b="0" lang="ru-RU" sz="3200" spc="-1" strike="noStrike">
+            <a:endParaRPr b="0" lang="en-US" sz="3200" spc="-1" strike="noStrike">
               <a:latin typeface="Arial"/>
             </a:endParaRPr>
           </a:p>
@@ -1685,7 +1538,7 @@
             <a:spLocks noGrp="1"/>
           </p:cNvSpPr>
           <p:nvPr>
-            <p:ph type="ftr" idx="2"/>
+            <p:ph type="ftr" idx="1"/>
           </p:nvPr>
         </p:nvSpPr>
         <p:spPr/>
@@ -1705,14 +1558,14 @@
             <a:spLocks noGrp="1"/>
           </p:cNvSpPr>
           <p:nvPr>
-            <p:ph type="sldNum" idx="3"/>
+            <p:ph type="sldNum" idx="2"/>
           </p:nvPr>
         </p:nvSpPr>
         <p:spPr/>
         <p:txBody>
           <a:bodyPr/>
           <a:p>
-            <a:fld id="{3CCC8CFC-DB91-4505-89EB-6DE270527A35}" type="slidenum">
+            <a:fld id="{361F9907-B7B4-41BA-8729-CD25F20E0445}" type="slidenum">
               <a:t>&lt;#&gt;</a:t>
             </a:fld>
           </a:p>
@@ -1725,7 +1578,7 @@
             <a:spLocks noGrp="1"/>
           </p:cNvSpPr>
           <p:nvPr>
-            <p:ph type="dt" idx="1"/>
+            <p:ph type="dt" idx="3"/>
           </p:nvPr>
         </p:nvSpPr>
         <p:spPr/>
@@ -1733,7 +1586,7 @@
           <a:bodyPr/>
           <a:p>
             <a:r>
-              <a:rPr lang="ru-RU"/>
+              <a:rPr lang="en-US"/>
               <a:t/>
             </a:r>
           </a:p>
@@ -1774,7 +1627,7 @@
         <p:spPr>
           <a:xfrm>
             <a:off x="1143000" y="841680"/>
-            <a:ext cx="6857640" cy="1790280"/>
+            <a:ext cx="6857280" cy="1789920"/>
           </a:xfrm>
           <a:prstGeom prst="rect">
             <a:avLst/>
@@ -1789,11 +1642,11 @@
             <a:noAutofit/>
           </a:bodyPr>
           <a:p>
-            <a:endParaRPr b="0" lang="en-US" sz="1800" spc="-1" strike="noStrike">
-              <a:solidFill>
-                <a:srgbClr val="000000"/>
-              </a:solidFill>
-              <a:latin typeface="Calibri"/>
+            <a:pPr algn="ctr">
+              <a:buNone/>
+            </a:pPr>
+            <a:endParaRPr b="0" lang="en-US" sz="4400" spc="-1" strike="noStrike">
+              <a:latin typeface="Arial"/>
             </a:endParaRPr>
           </a:p>
         </p:txBody>
@@ -1826,20 +1679,8 @@
             <a:normAutofit/>
           </a:bodyPr>
           <a:p>
-            <a:pPr>
-              <a:lnSpc>
-                <a:spcPct val="90000"/>
-              </a:lnSpc>
-              <a:spcBef>
-                <a:spcPts val="1417"/>
-              </a:spcBef>
-              <a:buNone/>
-            </a:pPr>
-            <a:endParaRPr b="0" lang="en-US" sz="2100" spc="-1" strike="noStrike">
-              <a:solidFill>
-                <a:srgbClr val="000000"/>
-              </a:solidFill>
-              <a:latin typeface="Calibri"/>
+            <a:endParaRPr b="0" lang="en-US" sz="3200" spc="-1" strike="noStrike">
+              <a:latin typeface="Arial"/>
             </a:endParaRPr>
           </a:p>
         </p:txBody>
@@ -1851,7 +1692,7 @@
             <a:spLocks noGrp="1"/>
           </p:cNvSpPr>
           <p:nvPr>
-            <p:ph type="ftr" idx="2"/>
+            <p:ph type="ftr" idx="1"/>
           </p:nvPr>
         </p:nvSpPr>
         <p:spPr/>
@@ -1871,14 +1712,14 @@
             <a:spLocks noGrp="1"/>
           </p:cNvSpPr>
           <p:nvPr>
-            <p:ph type="sldNum" idx="3"/>
+            <p:ph type="sldNum" idx="2"/>
           </p:nvPr>
         </p:nvSpPr>
         <p:spPr/>
         <p:txBody>
           <a:bodyPr/>
           <a:p>
-            <a:fld id="{3FB4318C-9C8B-49AE-9678-EF531775959F}" type="slidenum">
+            <a:fld id="{DCD5C025-2DE3-4DC2-A250-BE51ED8EA122}" type="slidenum">
               <a:t>&lt;#&gt;</a:t>
             </a:fld>
           </a:p>
@@ -1891,7 +1732,7 @@
             <a:spLocks noGrp="1"/>
           </p:cNvSpPr>
           <p:nvPr>
-            <p:ph type="dt" idx="1"/>
+            <p:ph type="dt" idx="3"/>
           </p:nvPr>
         </p:nvSpPr>
         <p:spPr/>
@@ -1899,7 +1740,7 @@
           <a:bodyPr/>
           <a:p>
             <a:r>
-              <a:rPr lang="ru-RU"/>
+              <a:rPr lang="en-US"/>
               <a:t/>
             </a:r>
           </a:p>
@@ -1940,7 +1781,7 @@
         <p:spPr>
           <a:xfrm>
             <a:off x="1143000" y="841680"/>
-            <a:ext cx="6857640" cy="1790280"/>
+            <a:ext cx="6857280" cy="1789920"/>
           </a:xfrm>
           <a:prstGeom prst="rect">
             <a:avLst/>
@@ -1955,11 +1796,11 @@
             <a:noAutofit/>
           </a:bodyPr>
           <a:p>
-            <a:endParaRPr b="0" lang="en-US" sz="1800" spc="-1" strike="noStrike">
-              <a:solidFill>
-                <a:srgbClr val="000000"/>
-              </a:solidFill>
-              <a:latin typeface="Calibri"/>
+            <a:pPr algn="ctr">
+              <a:buNone/>
+            </a:pPr>
+            <a:endParaRPr b="0" lang="en-US" sz="4400" spc="-1" strike="noStrike">
+              <a:latin typeface="Arial"/>
             </a:endParaRPr>
           </a:p>
         </p:txBody>
@@ -1992,20 +1833,8 @@
             <a:normAutofit/>
           </a:bodyPr>
           <a:p>
-            <a:pPr>
-              <a:lnSpc>
-                <a:spcPct val="90000"/>
-              </a:lnSpc>
-              <a:spcBef>
-                <a:spcPts val="1417"/>
-              </a:spcBef>
-              <a:buNone/>
-            </a:pPr>
-            <a:endParaRPr b="0" lang="en-US" sz="2100" spc="-1" strike="noStrike">
-              <a:solidFill>
-                <a:srgbClr val="000000"/>
-              </a:solidFill>
-              <a:latin typeface="Calibri"/>
+            <a:endParaRPr b="0" lang="en-US" sz="3200" spc="-1" strike="noStrike">
+              <a:latin typeface="Arial"/>
             </a:endParaRPr>
           </a:p>
         </p:txBody>
@@ -2038,20 +1867,8 @@
             <a:normAutofit/>
           </a:bodyPr>
           <a:p>
-            <a:pPr>
-              <a:lnSpc>
-                <a:spcPct val="90000"/>
-              </a:lnSpc>
-              <a:spcBef>
-                <a:spcPts val="1417"/>
-              </a:spcBef>
-              <a:buNone/>
-            </a:pPr>
-            <a:endParaRPr b="0" lang="en-US" sz="2100" spc="-1" strike="noStrike">
-              <a:solidFill>
-                <a:srgbClr val="000000"/>
-              </a:solidFill>
-              <a:latin typeface="Calibri"/>
+            <a:endParaRPr b="0" lang="en-US" sz="3200" spc="-1" strike="noStrike">
+              <a:latin typeface="Arial"/>
             </a:endParaRPr>
           </a:p>
         </p:txBody>
@@ -2063,7 +1880,7 @@
             <a:spLocks noGrp="1"/>
           </p:cNvSpPr>
           <p:nvPr>
-            <p:ph type="ftr" idx="2"/>
+            <p:ph type="ftr" idx="1"/>
           </p:nvPr>
         </p:nvSpPr>
         <p:spPr/>
@@ -2083,14 +1900,14 @@
             <a:spLocks noGrp="1"/>
           </p:cNvSpPr>
           <p:nvPr>
-            <p:ph type="sldNum" idx="3"/>
+            <p:ph type="sldNum" idx="2"/>
           </p:nvPr>
         </p:nvSpPr>
         <p:spPr/>
         <p:txBody>
           <a:bodyPr/>
           <a:p>
-            <a:fld id="{F2D18AC8-0713-4BCF-89FE-895EBC15E4CD}" type="slidenum">
+            <a:fld id="{8CC61899-F0E3-4D96-96E5-1D74866A18D2}" type="slidenum">
               <a:t>&lt;#&gt;</a:t>
             </a:fld>
           </a:p>
@@ -2103,7 +1920,7 @@
             <a:spLocks noGrp="1"/>
           </p:cNvSpPr>
           <p:nvPr>
-            <p:ph type="dt" idx="1"/>
+            <p:ph type="dt" idx="3"/>
           </p:nvPr>
         </p:nvSpPr>
         <p:spPr/>
@@ -2111,7 +1928,7 @@
           <a:bodyPr/>
           <a:p>
             <a:r>
-              <a:rPr lang="ru-RU"/>
+              <a:rPr lang="en-US"/>
               <a:t/>
             </a:r>
           </a:p>
@@ -2152,7 +1969,7 @@
         <p:spPr>
           <a:xfrm>
             <a:off x="1143000" y="841680"/>
-            <a:ext cx="6857640" cy="1790280"/>
+            <a:ext cx="6857280" cy="1789920"/>
           </a:xfrm>
           <a:prstGeom prst="rect">
             <a:avLst/>
@@ -2167,11 +1984,11 @@
             <a:noAutofit/>
           </a:bodyPr>
           <a:p>
-            <a:endParaRPr b="0" lang="en-US" sz="1800" spc="-1" strike="noStrike">
-              <a:solidFill>
-                <a:srgbClr val="000000"/>
-              </a:solidFill>
-              <a:latin typeface="Calibri"/>
+            <a:pPr algn="ctr">
+              <a:buNone/>
+            </a:pPr>
+            <a:endParaRPr b="0" lang="en-US" sz="4400" spc="-1" strike="noStrike">
+              <a:latin typeface="Arial"/>
             </a:endParaRPr>
           </a:p>
         </p:txBody>
@@ -2183,7 +2000,7 @@
             <a:spLocks noGrp="1"/>
           </p:cNvSpPr>
           <p:nvPr>
-            <p:ph type="ftr" idx="2"/>
+            <p:ph type="ftr" idx="1"/>
           </p:nvPr>
         </p:nvSpPr>
         <p:spPr/>
@@ -2203,14 +2020,14 @@
             <a:spLocks noGrp="1"/>
           </p:cNvSpPr>
           <p:nvPr>
-            <p:ph type="sldNum" idx="3"/>
+            <p:ph type="sldNum" idx="2"/>
           </p:nvPr>
         </p:nvSpPr>
         <p:spPr/>
         <p:txBody>
           <a:bodyPr/>
           <a:p>
-            <a:fld id="{820D2180-9F3F-46A2-8036-EB1DF1D81CCD}" type="slidenum">
+            <a:fld id="{23494FCA-812D-4EFA-B4BB-3C89E7A0071B}" type="slidenum">
               <a:t>&lt;#&gt;</a:t>
             </a:fld>
           </a:p>
@@ -2223,7 +2040,7 @@
             <a:spLocks noGrp="1"/>
           </p:cNvSpPr>
           <p:nvPr>
-            <p:ph type="dt" idx="1"/>
+            <p:ph type="dt" idx="3"/>
           </p:nvPr>
         </p:nvSpPr>
         <p:spPr/>
@@ -2231,7 +2048,7 @@
           <a:bodyPr/>
           <a:p>
             <a:r>
-              <a:rPr lang="ru-RU"/>
+              <a:rPr lang="en-US"/>
               <a:t/>
             </a:r>
           </a:p>
@@ -2272,7 +2089,7 @@
         <p:spPr>
           <a:xfrm>
             <a:off x="1143000" y="841680"/>
-            <a:ext cx="6857640" cy="8299800"/>
+            <a:ext cx="6857280" cy="8298360"/>
           </a:xfrm>
           <a:prstGeom prst="rect">
             <a:avLst/>
@@ -2290,7 +2107,7 @@
             <a:pPr algn="ctr">
               <a:buNone/>
             </a:pPr>
-            <a:endParaRPr b="0" lang="ru-RU" sz="3200" spc="-1" strike="noStrike">
+            <a:endParaRPr b="0" lang="en-US" sz="3200" spc="-1" strike="noStrike">
               <a:latin typeface="Arial"/>
             </a:endParaRPr>
           </a:p>
@@ -2303,7 +2120,7 @@
             <a:spLocks noGrp="1"/>
           </p:cNvSpPr>
           <p:nvPr>
-            <p:ph type="ftr" idx="2"/>
+            <p:ph type="ftr" idx="1"/>
           </p:nvPr>
         </p:nvSpPr>
         <p:spPr/>
@@ -2323,14 +2140,14 @@
             <a:spLocks noGrp="1"/>
           </p:cNvSpPr>
           <p:nvPr>
-            <p:ph type="sldNum" idx="3"/>
+            <p:ph type="sldNum" idx="2"/>
           </p:nvPr>
         </p:nvSpPr>
         <p:spPr/>
         <p:txBody>
           <a:bodyPr/>
           <a:p>
-            <a:fld id="{9A4F3512-11EE-41E0-85A7-41424DFA56CB}" type="slidenum">
+            <a:fld id="{63681BA7-C44D-40FE-B04D-61804513F155}" type="slidenum">
               <a:t>&lt;#&gt;</a:t>
             </a:fld>
           </a:p>
@@ -2343,7 +2160,7 @@
             <a:spLocks noGrp="1"/>
           </p:cNvSpPr>
           <p:nvPr>
-            <p:ph type="dt" idx="1"/>
+            <p:ph type="dt" idx="3"/>
           </p:nvPr>
         </p:nvSpPr>
         <p:spPr/>
@@ -2351,7 +2168,7 @@
           <a:bodyPr/>
           <a:p>
             <a:r>
-              <a:rPr lang="ru-RU"/>
+              <a:rPr lang="en-US"/>
               <a:t/>
             </a:r>
           </a:p>
@@ -2392,7 +2209,7 @@
         <p:spPr>
           <a:xfrm>
             <a:off x="1143000" y="841680"/>
-            <a:ext cx="6857640" cy="1790280"/>
+            <a:ext cx="6857280" cy="1789920"/>
           </a:xfrm>
           <a:prstGeom prst="rect">
             <a:avLst/>
@@ -2407,11 +2224,11 @@
             <a:noAutofit/>
           </a:bodyPr>
           <a:p>
-            <a:endParaRPr b="0" lang="en-US" sz="1800" spc="-1" strike="noStrike">
-              <a:solidFill>
-                <a:srgbClr val="000000"/>
-              </a:solidFill>
-              <a:latin typeface="Calibri"/>
+            <a:pPr algn="ctr">
+              <a:buNone/>
+            </a:pPr>
+            <a:endParaRPr b="0" lang="en-US" sz="4400" spc="-1" strike="noStrike">
+              <a:latin typeface="Arial"/>
             </a:endParaRPr>
           </a:p>
         </p:txBody>
@@ -2444,20 +2261,8 @@
             <a:normAutofit/>
           </a:bodyPr>
           <a:p>
-            <a:pPr>
-              <a:lnSpc>
-                <a:spcPct val="90000"/>
-              </a:lnSpc>
-              <a:spcBef>
-                <a:spcPts val="1417"/>
-              </a:spcBef>
-              <a:buNone/>
-            </a:pPr>
-            <a:endParaRPr b="0" lang="en-US" sz="2100" spc="-1" strike="noStrike">
-              <a:solidFill>
-                <a:srgbClr val="000000"/>
-              </a:solidFill>
-              <a:latin typeface="Calibri"/>
+            <a:endParaRPr b="0" lang="en-US" sz="3200" spc="-1" strike="noStrike">
+              <a:latin typeface="Arial"/>
             </a:endParaRPr>
           </a:p>
         </p:txBody>
@@ -2490,20 +2295,8 @@
             <a:normAutofit/>
           </a:bodyPr>
           <a:p>
-            <a:pPr>
-              <a:lnSpc>
-                <a:spcPct val="90000"/>
-              </a:lnSpc>
-              <a:spcBef>
-                <a:spcPts val="1417"/>
-              </a:spcBef>
-              <a:buNone/>
-            </a:pPr>
-            <a:endParaRPr b="0" lang="en-US" sz="2100" spc="-1" strike="noStrike">
-              <a:solidFill>
-                <a:srgbClr val="000000"/>
-              </a:solidFill>
-              <a:latin typeface="Calibri"/>
+            <a:endParaRPr b="0" lang="en-US" sz="3200" spc="-1" strike="noStrike">
+              <a:latin typeface="Arial"/>
             </a:endParaRPr>
           </a:p>
         </p:txBody>
@@ -2536,20 +2329,8 @@
             <a:normAutofit/>
           </a:bodyPr>
           <a:p>
-            <a:pPr>
-              <a:lnSpc>
-                <a:spcPct val="90000"/>
-              </a:lnSpc>
-              <a:spcBef>
-                <a:spcPts val="1417"/>
-              </a:spcBef>
-              <a:buNone/>
-            </a:pPr>
-            <a:endParaRPr b="0" lang="en-US" sz="2100" spc="-1" strike="noStrike">
-              <a:solidFill>
-                <a:srgbClr val="000000"/>
-              </a:solidFill>
-              <a:latin typeface="Calibri"/>
+            <a:endParaRPr b="0" lang="en-US" sz="3200" spc="-1" strike="noStrike">
+              <a:latin typeface="Arial"/>
             </a:endParaRPr>
           </a:p>
         </p:txBody>
@@ -2561,7 +2342,7 @@
             <a:spLocks noGrp="1"/>
           </p:cNvSpPr>
           <p:nvPr>
-            <p:ph type="ftr" idx="2"/>
+            <p:ph type="ftr" idx="1"/>
           </p:nvPr>
         </p:nvSpPr>
         <p:spPr/>
@@ -2581,14 +2362,14 @@
             <a:spLocks noGrp="1"/>
           </p:cNvSpPr>
           <p:nvPr>
-            <p:ph type="sldNum" idx="3"/>
+            <p:ph type="sldNum" idx="2"/>
           </p:nvPr>
         </p:nvSpPr>
         <p:spPr/>
         <p:txBody>
           <a:bodyPr/>
           <a:p>
-            <a:fld id="{70070154-A9A0-4332-A5B9-723A11135F81}" type="slidenum">
+            <a:fld id="{D54A8335-94CD-42A6-928C-82CA518381EA}" type="slidenum">
               <a:t>&lt;#&gt;</a:t>
             </a:fld>
           </a:p>
@@ -2601,7 +2382,7 @@
             <a:spLocks noGrp="1"/>
           </p:cNvSpPr>
           <p:nvPr>
-            <p:ph type="dt" idx="1"/>
+            <p:ph type="dt" idx="3"/>
           </p:nvPr>
         </p:nvSpPr>
         <p:spPr/>
@@ -2609,7 +2390,7 @@
           <a:bodyPr/>
           <a:p>
             <a:r>
-              <a:rPr lang="ru-RU"/>
+              <a:rPr lang="en-US"/>
               <a:t/>
             </a:r>
           </a:p>
@@ -2650,7 +2431,7 @@
         <p:spPr>
           <a:xfrm>
             <a:off x="1143000" y="841680"/>
-            <a:ext cx="6857640" cy="1790280"/>
+            <a:ext cx="6857280" cy="1789920"/>
           </a:xfrm>
           <a:prstGeom prst="rect">
             <a:avLst/>
@@ -2665,11 +2446,11 @@
             <a:noAutofit/>
           </a:bodyPr>
           <a:p>
-            <a:endParaRPr b="0" lang="en-US" sz="1800" spc="-1" strike="noStrike">
-              <a:solidFill>
-                <a:srgbClr val="000000"/>
-              </a:solidFill>
-              <a:latin typeface="Calibri"/>
+            <a:pPr algn="ctr">
+              <a:buNone/>
+            </a:pPr>
+            <a:endParaRPr b="0" lang="en-US" sz="4400" spc="-1" strike="noStrike">
+              <a:latin typeface="Arial"/>
             </a:endParaRPr>
           </a:p>
         </p:txBody>
@@ -2702,20 +2483,8 @@
             <a:normAutofit/>
           </a:bodyPr>
           <a:p>
-            <a:pPr>
-              <a:lnSpc>
-                <a:spcPct val="90000"/>
-              </a:lnSpc>
-              <a:spcBef>
-                <a:spcPts val="1417"/>
-              </a:spcBef>
-              <a:buNone/>
-            </a:pPr>
-            <a:endParaRPr b="0" lang="en-US" sz="2100" spc="-1" strike="noStrike">
-              <a:solidFill>
-                <a:srgbClr val="000000"/>
-              </a:solidFill>
-              <a:latin typeface="Calibri"/>
+            <a:endParaRPr b="0" lang="en-US" sz="3200" spc="-1" strike="noStrike">
+              <a:latin typeface="Arial"/>
             </a:endParaRPr>
           </a:p>
         </p:txBody>
@@ -2748,20 +2517,8 @@
             <a:normAutofit/>
           </a:bodyPr>
           <a:p>
-            <a:pPr>
-              <a:lnSpc>
-                <a:spcPct val="90000"/>
-              </a:lnSpc>
-              <a:spcBef>
-                <a:spcPts val="1417"/>
-              </a:spcBef>
-              <a:buNone/>
-            </a:pPr>
-            <a:endParaRPr b="0" lang="en-US" sz="2100" spc="-1" strike="noStrike">
-              <a:solidFill>
-                <a:srgbClr val="000000"/>
-              </a:solidFill>
-              <a:latin typeface="Calibri"/>
+            <a:endParaRPr b="0" lang="en-US" sz="3200" spc="-1" strike="noStrike">
+              <a:latin typeface="Arial"/>
             </a:endParaRPr>
           </a:p>
         </p:txBody>
@@ -2794,20 +2551,8 @@
             <a:normAutofit/>
           </a:bodyPr>
           <a:p>
-            <a:pPr>
-              <a:lnSpc>
-                <a:spcPct val="90000"/>
-              </a:lnSpc>
-              <a:spcBef>
-                <a:spcPts val="1417"/>
-              </a:spcBef>
-              <a:buNone/>
-            </a:pPr>
-            <a:endParaRPr b="0" lang="en-US" sz="2100" spc="-1" strike="noStrike">
-              <a:solidFill>
-                <a:srgbClr val="000000"/>
-              </a:solidFill>
-              <a:latin typeface="Calibri"/>
+            <a:endParaRPr b="0" lang="en-US" sz="3200" spc="-1" strike="noStrike">
+              <a:latin typeface="Arial"/>
             </a:endParaRPr>
           </a:p>
         </p:txBody>
@@ -2819,7 +2564,7 @@
             <a:spLocks noGrp="1"/>
           </p:cNvSpPr>
           <p:nvPr>
-            <p:ph type="ftr" idx="2"/>
+            <p:ph type="ftr" idx="1"/>
           </p:nvPr>
         </p:nvSpPr>
         <p:spPr/>
@@ -2839,14 +2584,14 @@
             <a:spLocks noGrp="1"/>
           </p:cNvSpPr>
           <p:nvPr>
-            <p:ph type="sldNum" idx="3"/>
+            <p:ph type="sldNum" idx="2"/>
           </p:nvPr>
         </p:nvSpPr>
         <p:spPr/>
         <p:txBody>
           <a:bodyPr/>
           <a:p>
-            <a:fld id="{658A7F37-C78D-43D5-8078-60B3B4DA524B}" type="slidenum">
+            <a:fld id="{B6DF237D-C6AB-45CA-BB21-721E00CE33F8}" type="slidenum">
               <a:t>&lt;#&gt;</a:t>
             </a:fld>
           </a:p>
@@ -2859,7 +2604,7 @@
             <a:spLocks noGrp="1"/>
           </p:cNvSpPr>
           <p:nvPr>
-            <p:ph type="dt" idx="1"/>
+            <p:ph type="dt" idx="3"/>
           </p:nvPr>
         </p:nvSpPr>
         <p:spPr/>
@@ -2867,7 +2612,7 @@
           <a:bodyPr/>
           <a:p>
             <a:r>
-              <a:rPr lang="ru-RU"/>
+              <a:rPr lang="en-US"/>
               <a:t/>
             </a:r>
           </a:p>
@@ -2908,7 +2653,7 @@
         <p:spPr>
           <a:xfrm>
             <a:off x="1143000" y="841680"/>
-            <a:ext cx="6857640" cy="1790280"/>
+            <a:ext cx="6857280" cy="1789920"/>
           </a:xfrm>
           <a:prstGeom prst="rect">
             <a:avLst/>
@@ -2923,11 +2668,11 @@
             <a:noAutofit/>
           </a:bodyPr>
           <a:p>
-            <a:endParaRPr b="0" lang="en-US" sz="1800" spc="-1" strike="noStrike">
-              <a:solidFill>
-                <a:srgbClr val="000000"/>
-              </a:solidFill>
-              <a:latin typeface="Calibri"/>
+            <a:pPr algn="ctr">
+              <a:buNone/>
+            </a:pPr>
+            <a:endParaRPr b="0" lang="en-US" sz="4400" spc="-1" strike="noStrike">
+              <a:latin typeface="Arial"/>
             </a:endParaRPr>
           </a:p>
         </p:txBody>
@@ -2960,20 +2705,8 @@
             <a:normAutofit/>
           </a:bodyPr>
           <a:p>
-            <a:pPr>
-              <a:lnSpc>
-                <a:spcPct val="90000"/>
-              </a:lnSpc>
-              <a:spcBef>
-                <a:spcPts val="1417"/>
-              </a:spcBef>
-              <a:buNone/>
-            </a:pPr>
-            <a:endParaRPr b="0" lang="en-US" sz="2100" spc="-1" strike="noStrike">
-              <a:solidFill>
-                <a:srgbClr val="000000"/>
-              </a:solidFill>
-              <a:latin typeface="Calibri"/>
+            <a:endParaRPr b="0" lang="en-US" sz="3200" spc="-1" strike="noStrike">
+              <a:latin typeface="Arial"/>
             </a:endParaRPr>
           </a:p>
         </p:txBody>
@@ -3006,20 +2739,8 @@
             <a:normAutofit/>
           </a:bodyPr>
           <a:p>
-            <a:pPr>
-              <a:lnSpc>
-                <a:spcPct val="90000"/>
-              </a:lnSpc>
-              <a:spcBef>
-                <a:spcPts val="1417"/>
-              </a:spcBef>
-              <a:buNone/>
-            </a:pPr>
-            <a:endParaRPr b="0" lang="en-US" sz="2100" spc="-1" strike="noStrike">
-              <a:solidFill>
-                <a:srgbClr val="000000"/>
-              </a:solidFill>
-              <a:latin typeface="Calibri"/>
+            <a:endParaRPr b="0" lang="en-US" sz="3200" spc="-1" strike="noStrike">
+              <a:latin typeface="Arial"/>
             </a:endParaRPr>
           </a:p>
         </p:txBody>
@@ -3052,20 +2773,8 @@
             <a:normAutofit/>
           </a:bodyPr>
           <a:p>
-            <a:pPr>
-              <a:lnSpc>
-                <a:spcPct val="90000"/>
-              </a:lnSpc>
-              <a:spcBef>
-                <a:spcPts val="1417"/>
-              </a:spcBef>
-              <a:buNone/>
-            </a:pPr>
-            <a:endParaRPr b="0" lang="en-US" sz="2100" spc="-1" strike="noStrike">
-              <a:solidFill>
-                <a:srgbClr val="000000"/>
-              </a:solidFill>
-              <a:latin typeface="Calibri"/>
+            <a:endParaRPr b="0" lang="en-US" sz="3200" spc="-1" strike="noStrike">
+              <a:latin typeface="Arial"/>
             </a:endParaRPr>
           </a:p>
         </p:txBody>
@@ -3077,7 +2786,7 @@
             <a:spLocks noGrp="1"/>
           </p:cNvSpPr>
           <p:nvPr>
-            <p:ph type="ftr" idx="2"/>
+            <p:ph type="ftr" idx="1"/>
           </p:nvPr>
         </p:nvSpPr>
         <p:spPr/>
@@ -3097,14 +2806,14 @@
             <a:spLocks noGrp="1"/>
           </p:cNvSpPr>
           <p:nvPr>
-            <p:ph type="sldNum" idx="3"/>
+            <p:ph type="sldNum" idx="2"/>
           </p:nvPr>
         </p:nvSpPr>
         <p:spPr/>
         <p:txBody>
           <a:bodyPr/>
           <a:p>
-            <a:fld id="{B880F5B6-AF9F-4692-BB32-597F0D5B3824}" type="slidenum">
+            <a:fld id="{075E99AA-8BE8-4CE6-B301-546878C050A7}" type="slidenum">
               <a:t>&lt;#&gt;</a:t>
             </a:fld>
           </a:p>
@@ -3117,7 +2826,7 @@
             <a:spLocks noGrp="1"/>
           </p:cNvSpPr>
           <p:nvPr>
-            <p:ph type="dt" idx="1"/>
+            <p:ph type="dt" idx="3"/>
           </p:nvPr>
         </p:nvSpPr>
         <p:spPr/>
@@ -3125,7 +2834,7 @@
           <a:bodyPr/>
           <a:p>
             <a:r>
-              <a:rPr lang="ru-RU"/>
+              <a:rPr lang="en-US"/>
               <a:t/>
             </a:r>
           </a:p>
@@ -3173,41 +2882,29 @@
         <p:spPr>
           <a:xfrm>
             <a:off x="1143000" y="841680"/>
-            <a:ext cx="6857640" cy="1790280"/>
-          </a:xfrm>
-          <a:prstGeom prst="rect">
-            <a:avLst/>
-          </a:prstGeom>
-          <a:noFill/>
-          <a:ln w="0">
-            <a:noFill/>
-          </a:ln>
-        </p:spPr>
-        <p:txBody>
-          <a:bodyPr anchor="b">
-            <a:noAutofit/>
-          </a:bodyPr>
-          <a:p>
-            <a:pPr algn="ctr">
-              <a:lnSpc>
-                <a:spcPct val="90000"/>
-              </a:lnSpc>
-              <a:buNone/>
-            </a:pPr>
-            <a:r>
-              <a:rPr b="0" lang="ru-RU" sz="4500" spc="-1" strike="noStrike">
-                <a:solidFill>
-                  <a:srgbClr val="000000"/>
-                </a:solidFill>
-                <a:latin typeface="Calibri Light"/>
-              </a:rPr>
-              <a:t>Образец заголовка</a:t>
-            </a:r>
-            <a:endParaRPr b="0" lang="en-US" sz="4500" spc="-1" strike="noStrike">
-              <a:solidFill>
-                <a:srgbClr val="000000"/>
-              </a:solidFill>
-              <a:latin typeface="Calibri"/>
+            <a:ext cx="6857280" cy="1789920"/>
+          </a:xfrm>
+          <a:prstGeom prst="rect">
+            <a:avLst/>
+          </a:prstGeom>
+          <a:noFill/>
+          <a:ln w="0">
+            <a:noFill/>
+          </a:ln>
+        </p:spPr>
+        <p:txBody>
+          <a:bodyPr lIns="0" rIns="0" tIns="0" bIns="0" anchor="ctr">
+            <a:noAutofit/>
+          </a:bodyPr>
+          <a:p>
+            <a:r>
+              <a:rPr b="0" lang="en-US" sz="1800" spc="-1" strike="noStrike">
+                <a:latin typeface="Arial"/>
+              </a:rPr>
+              <a:t>Click to edit the title text format</a:t>
+            </a:r>
+            <a:endParaRPr b="0" lang="en-US" sz="1800" spc="-1" strike="noStrike">
+              <a:latin typeface="Arial"/>
             </a:endParaRPr>
           </a:p>
         </p:txBody>
@@ -3219,91 +2916,31 @@
             <a:spLocks noGrp="1"/>
           </p:cNvSpPr>
           <p:nvPr>
-            <p:ph type="dt" idx="1"/>
-          </p:nvPr>
-        </p:nvSpPr>
-        <p:spPr>
-          <a:xfrm>
-            <a:off x="628560" y="4767120"/>
-            <a:ext cx="2057040" cy="273600"/>
-          </a:xfrm>
-          <a:prstGeom prst="rect">
-            <a:avLst/>
-          </a:prstGeom>
-          <a:noFill/>
-          <a:ln w="0">
-            <a:noFill/>
-          </a:ln>
-        </p:spPr>
-        <p:txBody>
-          <a:bodyPr anchor="ctr">
+            <p:ph type="ftr" idx="1"/>
+          </p:nvPr>
+        </p:nvSpPr>
+        <p:spPr>
+          <a:xfrm>
+            <a:off x="3029040" y="4767120"/>
+            <a:ext cx="3085560" cy="273240"/>
+          </a:xfrm>
+          <a:prstGeom prst="rect">
+            <a:avLst/>
+          </a:prstGeom>
+          <a:noFill/>
+          <a:ln w="0">
+            <a:noFill/>
+          </a:ln>
+        </p:spPr>
+        <p:txBody>
+          <a:bodyPr lIns="90000" rIns="90000" tIns="45000" bIns="45000" anchor="ctr">
             <a:noAutofit/>
           </a:bodyPr>
           <a:lstStyle>
-            <a:lvl1pPr>
+            <a:lvl1pPr algn="ctr">
               <a:lnSpc>
                 <a:spcPct val="100000"/>
               </a:lnSpc>
-              <a:buNone/>
-              <a:defRPr b="0" lang="en-US" sz="900" spc="-1" strike="noStrike">
-                <a:solidFill>
-                  <a:srgbClr val="8b8b8b"/>
-                </a:solidFill>
-                <a:latin typeface="Calibri"/>
-              </a:defRPr>
-            </a:lvl1pPr>
-          </a:lstStyle>
-          <a:p>
-            <a:pPr>
-              <a:lnSpc>
-                <a:spcPct val="100000"/>
-              </a:lnSpc>
-              <a:buNone/>
-            </a:pPr>
-            <a:r>
-              <a:rPr b="0" lang="en-US" sz="900" spc="-1" strike="noStrike">
-                <a:solidFill>
-                  <a:srgbClr val="8b8b8b"/>
-                </a:solidFill>
-                <a:latin typeface="Calibri"/>
-              </a:rPr>
-              <a:t>&lt;дата/время&gt;</a:t>
-            </a:r>
-            <a:endParaRPr b="0" lang="ru-RU" sz="900" spc="-1" strike="noStrike">
-              <a:latin typeface="Times New Roman"/>
-            </a:endParaRPr>
-          </a:p>
-        </p:txBody>
-      </p:sp>
-      <p:sp>
-        <p:nvSpPr>
-          <p:cNvPr id="2" name="PlaceHolder 3"/>
-          <p:cNvSpPr>
-            <a:spLocks noGrp="1"/>
-          </p:cNvSpPr>
-          <p:nvPr>
-            <p:ph type="ftr" idx="2"/>
-          </p:nvPr>
-        </p:nvSpPr>
-        <p:spPr>
-          <a:xfrm>
-            <a:off x="3029040" y="4767120"/>
-            <a:ext cx="3085920" cy="273600"/>
-          </a:xfrm>
-          <a:prstGeom prst="rect">
-            <a:avLst/>
-          </a:prstGeom>
-          <a:noFill/>
-          <a:ln w="0">
-            <a:noFill/>
-          </a:ln>
-        </p:spPr>
-        <p:txBody>
-          <a:bodyPr anchor="ctr">
-            <a:noAutofit/>
-          </a:bodyPr>
-          <a:lstStyle>
-            <a:lvl1pPr algn="ctr">
               <a:buNone/>
               <a:defRPr b="0" lang="ru-RU" sz="1400" spc="-1" strike="noStrike">
                 <a:latin typeface="Times New Roman"/>
@@ -3312,15 +2949,18 @@
           </a:lstStyle>
           <a:p>
             <a:pPr algn="ctr">
+              <a:lnSpc>
+                <a:spcPct val="100000"/>
+              </a:lnSpc>
               <a:buNone/>
             </a:pPr>
             <a:r>
               <a:rPr b="0" lang="ru-RU" sz="1400" spc="-1" strike="noStrike">
                 <a:latin typeface="Times New Roman"/>
               </a:rPr>
-              <a:t>&lt;нижний колонтитул&gt;</a:t>
-            </a:r>
-            <a:endParaRPr b="0" lang="ru-RU" sz="1400" spc="-1" strike="noStrike">
+              <a:t>&lt;footer&gt;</a:t>
+            </a:r>
+            <a:endParaRPr b="0" lang="en-US" sz="1400" spc="-1" strike="noStrike">
               <a:latin typeface="Times New Roman"/>
             </a:endParaRPr>
           </a:p>
@@ -3328,29 +2968,29 @@
       </p:sp>
       <p:sp>
         <p:nvSpPr>
-          <p:cNvPr id="3" name="PlaceHolder 4"/>
-          <p:cNvSpPr>
-            <a:spLocks noGrp="1"/>
-          </p:cNvSpPr>
-          <p:nvPr>
-            <p:ph type="sldNum" idx="3"/>
+          <p:cNvPr id="2" name="PlaceHolder 3"/>
+          <p:cNvSpPr>
+            <a:spLocks noGrp="1"/>
+          </p:cNvSpPr>
+          <p:nvPr>
+            <p:ph type="sldNum" idx="2"/>
           </p:nvPr>
         </p:nvSpPr>
         <p:spPr>
           <a:xfrm>
             <a:off x="6458040" y="4767120"/>
-            <a:ext cx="2057040" cy="273600"/>
-          </a:xfrm>
-          <a:prstGeom prst="rect">
-            <a:avLst/>
-          </a:prstGeom>
-          <a:noFill/>
-          <a:ln w="0">
-            <a:noFill/>
-          </a:ln>
-        </p:spPr>
-        <p:txBody>
-          <a:bodyPr anchor="ctr">
+            <a:ext cx="2056680" cy="273240"/>
+          </a:xfrm>
+          <a:prstGeom prst="rect">
+            <a:avLst/>
+          </a:prstGeom>
+          <a:noFill/>
+          <a:ln w="0">
+            <a:noFill/>
+          </a:ln>
+        </p:spPr>
+        <p:txBody>
+          <a:bodyPr lIns="90000" rIns="90000" tIns="45000" bIns="45000" anchor="ctr">
             <a:noAutofit/>
           </a:bodyPr>
           <a:lstStyle>
@@ -3374,16 +3014,63 @@
               </a:lnSpc>
               <a:buNone/>
             </a:pPr>
-            <a:fld id="{A5D5B4D4-842B-406F-9358-7B601C2F8F25}" type="slidenum">
+            <a:fld id="{2FC347E8-F587-46D5-B24E-5F14C7366FD1}" type="slidenum">
               <a:rPr b="0" lang="en-US" sz="900" spc="-1" strike="noStrike">
                 <a:solidFill>
                   <a:srgbClr val="8b8b8b"/>
                 </a:solidFill>
                 <a:latin typeface="Calibri"/>
               </a:rPr>
-              <a:t>&lt;номер&gt;</a:t>
+              <a:t>&lt;number&gt;</a:t>
             </a:fld>
-            <a:endParaRPr b="0" lang="ru-RU" sz="900" spc="-1" strike="noStrike">
+            <a:endParaRPr b="0" lang="en-US" sz="900" spc="-1" strike="noStrike">
+              <a:latin typeface="Times New Roman"/>
+            </a:endParaRPr>
+          </a:p>
+        </p:txBody>
+      </p:sp>
+      <p:sp>
+        <p:nvSpPr>
+          <p:cNvPr id="3" name="PlaceHolder 4"/>
+          <p:cNvSpPr>
+            <a:spLocks noGrp="1"/>
+          </p:cNvSpPr>
+          <p:nvPr>
+            <p:ph type="dt" idx="3"/>
+          </p:nvPr>
+        </p:nvSpPr>
+        <p:spPr>
+          <a:xfrm>
+            <a:off x="628560" y="4767120"/>
+            <a:ext cx="2056680" cy="273240"/>
+          </a:xfrm>
+          <a:prstGeom prst="rect">
+            <a:avLst/>
+          </a:prstGeom>
+          <a:noFill/>
+          <a:ln w="0">
+            <a:noFill/>
+          </a:ln>
+        </p:spPr>
+        <p:txBody>
+          <a:bodyPr lIns="90000" rIns="90000" tIns="45000" bIns="45000" anchor="ctr">
+            <a:noAutofit/>
+          </a:bodyPr>
+          <a:lstStyle>
+            <a:lvl1pPr>
+              <a:defRPr b="0" lang="en-US" sz="1400" spc="-1" strike="noStrike">
+                <a:latin typeface="Times New Roman"/>
+              </a:defRPr>
+            </a:lvl1pPr>
+          </a:lstStyle>
+          <a:p>
+            <a:r>
+              <a:rPr b="0" lang="en-US" sz="1400" spc="-1" strike="noStrike">
+                <a:latin typeface="Times New Roman"/>
+              </a:rPr>
+              <a:t>&lt;date/time&gt;</a:t>
+            </a:r>
+            <a:endParaRPr b="0" lang="en-US" sz="1400" spc="-1" strike="noStrike">
               <a:latin typeface="Times New Roman"/>
             </a:endParaRPr>
           </a:p>
@@ -3418,9 +3105,6 @@
           </a:bodyPr>
           <a:p>
             <a:pPr marL="432000" indent="-324000">
-              <a:lnSpc>
-                <a:spcPct val="90000"/>
-              </a:lnSpc>
               <a:spcBef>
                 <a:spcPts val="1417"/>
               </a:spcBef>
@@ -3432,26 +3116,17 @@
               <a:buChar char=""/>
             </a:pPr>
             <a:r>
-              <a:rPr b="0" lang="en-US" sz="2100" spc="-1" strike="noStrike">
-                <a:solidFill>
-                  <a:srgbClr val="000000"/>
-                </a:solidFill>
-                <a:latin typeface="Calibri"/>
-              </a:rPr>
-              <a:t>Для правки структуры щёлкните мышью</a:t>
-            </a:r>
-            <a:endParaRPr b="0" lang="en-US" sz="2100" spc="-1" strike="noStrike">
-              <a:solidFill>
-                <a:srgbClr val="000000"/>
-              </a:solidFill>
-              <a:latin typeface="Calibri"/>
+              <a:rPr b="0" lang="en-US" sz="3200" spc="-1" strike="noStrike">
+                <a:latin typeface="Arial"/>
+              </a:rPr>
+              <a:t>Click to edit the outline text format</a:t>
+            </a:r>
+            <a:endParaRPr b="0" lang="en-US" sz="3200" spc="-1" strike="noStrike">
+              <a:latin typeface="Arial"/>
             </a:endParaRPr>
           </a:p>
           <a:p>
             <a:pPr lvl="1" marL="864000" indent="-324000">
-              <a:lnSpc>
-                <a:spcPct val="90000"/>
-              </a:lnSpc>
               <a:spcBef>
                 <a:spcPts val="1134"/>
               </a:spcBef>
@@ -3463,26 +3138,17 @@
               <a:buChar char=""/>
             </a:pPr>
             <a:r>
-              <a:rPr b="0" lang="en-US" sz="1500" spc="-1" strike="noStrike">
-                <a:solidFill>
-                  <a:srgbClr val="000000"/>
-                </a:solidFill>
-                <a:latin typeface="Calibri"/>
-              </a:rPr>
-              <a:t>Второй уровень структуры</a:t>
-            </a:r>
-            <a:endParaRPr b="0" lang="en-US" sz="1500" spc="-1" strike="noStrike">
-              <a:solidFill>
-                <a:srgbClr val="000000"/>
-              </a:solidFill>
-              <a:latin typeface="Calibri"/>
+              <a:rPr b="0" lang="en-US" sz="2800" spc="-1" strike="noStrike">
+                <a:latin typeface="Arial"/>
+              </a:rPr>
+              <a:t>Second Outline Level</a:t>
+            </a:r>
+            <a:endParaRPr b="0" lang="en-US" sz="2800" spc="-1" strike="noStrike">
+              <a:latin typeface="Arial"/>
             </a:endParaRPr>
           </a:p>
           <a:p>
             <a:pPr lvl="2" marL="1296000" indent="-288000">
-              <a:lnSpc>
-                <a:spcPct val="90000"/>
-              </a:lnSpc>
               <a:spcBef>
                 <a:spcPts val="850"/>
               </a:spcBef>
@@ -3494,26 +3160,17 @@
               <a:buChar char=""/>
             </a:pPr>
             <a:r>
-              <a:rPr b="0" lang="en-US" sz="1350" spc="-1" strike="noStrike">
-                <a:solidFill>
-                  <a:srgbClr val="000000"/>
-                </a:solidFill>
-                <a:latin typeface="Calibri"/>
-              </a:rPr>
-              <a:t>Третий уровень структуры</a:t>
-            </a:r>
-            <a:endParaRPr b="0" lang="en-US" sz="1350" spc="-1" strike="noStrike">
-              <a:solidFill>
-                <a:srgbClr val="000000"/>
-              </a:solidFill>
-              <a:latin typeface="Calibri"/>
+              <a:rPr b="0" lang="en-US" sz="2400" spc="-1" strike="noStrike">
+                <a:latin typeface="Arial"/>
+              </a:rPr>
+              <a:t>Third Outline Level</a:t>
+            </a:r>
+            <a:endParaRPr b="0" lang="en-US" sz="2400" spc="-1" strike="noStrike">
+              <a:latin typeface="Arial"/>
             </a:endParaRPr>
           </a:p>
           <a:p>
             <a:pPr lvl="3" marL="1728000" indent="-216000">
-              <a:lnSpc>
-                <a:spcPct val="90000"/>
-              </a:lnSpc>
               <a:spcBef>
                 <a:spcPts val="567"/>
               </a:spcBef>
@@ -3525,26 +3182,17 @@
               <a:buChar char=""/>
             </a:pPr>
             <a:r>
-              <a:rPr b="0" lang="en-US" sz="1350" spc="-1" strike="noStrike">
-                <a:solidFill>
-                  <a:srgbClr val="000000"/>
-                </a:solidFill>
-                <a:latin typeface="Calibri"/>
-              </a:rPr>
-              <a:t>Четвёртый уровень структуры</a:t>
-            </a:r>
-            <a:endParaRPr b="0" lang="en-US" sz="1350" spc="-1" strike="noStrike">
-              <a:solidFill>
-                <a:srgbClr val="000000"/>
-              </a:solidFill>
-              <a:latin typeface="Calibri"/>
+              <a:rPr b="0" lang="en-US" sz="2000" spc="-1" strike="noStrike">
+                <a:latin typeface="Arial"/>
+              </a:rPr>
+              <a:t>Fourth Outline Level</a:t>
+            </a:r>
+            <a:endParaRPr b="0" lang="en-US" sz="2000" spc="-1" strike="noStrike">
+              <a:latin typeface="Arial"/>
             </a:endParaRPr>
           </a:p>
           <a:p>
             <a:pPr lvl="4" marL="2160000" indent="-216000">
-              <a:lnSpc>
-                <a:spcPct val="90000"/>
-              </a:lnSpc>
               <a:spcBef>
                 <a:spcPts val="283"/>
               </a:spcBef>
@@ -3557,25 +3205,16 @@
             </a:pPr>
             <a:r>
               <a:rPr b="0" lang="en-US" sz="2000" spc="-1" strike="noStrike">
-                <a:solidFill>
-                  <a:srgbClr val="000000"/>
-                </a:solidFill>
-                <a:latin typeface="Calibri"/>
-              </a:rPr>
-              <a:t>Пятый уровень структуры</a:t>
+                <a:latin typeface="Arial"/>
+              </a:rPr>
+              <a:t>Fifth Outline Level</a:t>
             </a:r>
             <a:endParaRPr b="0" lang="en-US" sz="2000" spc="-1" strike="noStrike">
-              <a:solidFill>
-                <a:srgbClr val="000000"/>
-              </a:solidFill>
-              <a:latin typeface="Calibri"/>
+              <a:latin typeface="Arial"/>
             </a:endParaRPr>
           </a:p>
           <a:p>
             <a:pPr lvl="5" marL="2592000" indent="-216000">
-              <a:lnSpc>
-                <a:spcPct val="90000"/>
-              </a:lnSpc>
               <a:spcBef>
                 <a:spcPts val="283"/>
               </a:spcBef>
@@ -3588,25 +3227,16 @@
             </a:pPr>
             <a:r>
               <a:rPr b="0" lang="en-US" sz="2000" spc="-1" strike="noStrike">
-                <a:solidFill>
-                  <a:srgbClr val="000000"/>
-                </a:solidFill>
-                <a:latin typeface="Calibri"/>
-              </a:rPr>
-              <a:t>Шестой уровень структуры</a:t>
+                <a:latin typeface="Arial"/>
+              </a:rPr>
+              <a:t>Sixth Outline Level</a:t>
             </a:r>
             <a:endParaRPr b="0" lang="en-US" sz="2000" spc="-1" strike="noStrike">
-              <a:solidFill>
-                <a:srgbClr val="000000"/>
-              </a:solidFill>
-              <a:latin typeface="Calibri"/>
+              <a:latin typeface="Arial"/>
             </a:endParaRPr>
           </a:p>
           <a:p>
             <a:pPr lvl="6" marL="3024000" indent="-216000">
-              <a:lnSpc>
-                <a:spcPct val="90000"/>
-              </a:lnSpc>
               <a:spcBef>
                 <a:spcPts val="283"/>
               </a:spcBef>
@@ -3619,18 +3249,12 @@
             </a:pPr>
             <a:r>
               <a:rPr b="0" lang="en-US" sz="2000" spc="-1" strike="noStrike">
-                <a:solidFill>
-                  <a:srgbClr val="000000"/>
-                </a:solidFill>
-                <a:latin typeface="Calibri"/>
-              </a:rPr>
-              <a:t>Седьмой уровень структуры</a:t>
+                <a:latin typeface="Arial"/>
+              </a:rPr>
+              <a:t>Seventh Outline Level</a:t>
             </a:r>
             <a:endParaRPr b="0" lang="en-US" sz="2000" spc="-1" strike="noStrike">
-              <a:solidFill>
-                <a:srgbClr val="000000"/>
-              </a:solidFill>
-              <a:latin typeface="Calibri"/>
+              <a:latin typeface="Arial"/>
             </a:endParaRPr>
           </a:p>
         </p:txBody>
@@ -3688,7 +3312,7 @@
         <p:spPr>
           <a:xfrm>
             <a:off x="186840" y="185400"/>
-            <a:ext cx="8770320" cy="4758120"/>
+            <a:ext cx="8769960" cy="4757760"/>
           </a:xfrm>
           <a:prstGeom prst="roundRect">
             <a:avLst>
@@ -3726,7 +3350,7 @@
         <p:spPr>
           <a:xfrm>
             <a:off x="460080" y="658080"/>
-            <a:ext cx="8469000" cy="3306960"/>
+            <a:ext cx="8468640" cy="3306600"/>
           </a:xfrm>
           <a:prstGeom prst="rect">
             <a:avLst/>
@@ -3763,58 +3387,7 @@
               </a:rPr>
               <a:t>TITLE</a:t>
             </a:r>
-            <a:endParaRPr b="0" lang="ru-RU" sz="5400" spc="-1" strike="noStrike">
-              <a:latin typeface="Arial"/>
-            </a:endParaRPr>
-          </a:p>
-        </p:txBody>
-      </p:sp>
-      <p:sp>
-        <p:nvSpPr>
-          <p:cNvPr id="49" name="Прямоугольник 5"/>
-          <p:cNvSpPr/>
-          <p:nvPr/>
-        </p:nvSpPr>
-        <p:spPr>
-          <a:xfrm>
-            <a:off x="460080" y="358920"/>
-            <a:ext cx="2999160" cy="269640"/>
-          </a:xfrm>
-          <a:prstGeom prst="rect">
-            <a:avLst/>
-          </a:prstGeom>
-          <a:noFill/>
-          <a:ln w="0">
-            <a:noFill/>
-          </a:ln>
-        </p:spPr>
-        <p:style>
-          <a:lnRef idx="0"/>
-          <a:fillRef idx="0"/>
-          <a:effectRef idx="0"/>
-          <a:fontRef idx="minor"/>
-        </p:style>
-        <p:txBody>
-          <a:bodyPr lIns="90000" rIns="90000" tIns="45000" bIns="45000" anchor="t">
-            <a:noAutofit/>
-          </a:bodyPr>
-          <a:p>
-            <a:pPr>
-              <a:lnSpc>
-                <a:spcPts val="1650"/>
-              </a:lnSpc>
-              <a:buNone/>
-            </a:pPr>
-            <a:r>
-              <a:rPr b="0" lang="ru-RU" sz="1400" spc="-1" strike="noStrike">
-                <a:solidFill>
-                  <a:srgbClr val="f2f2f2"/>
-                </a:solidFill>
-                <a:latin typeface="Arial"/>
-              </a:rPr>
-              <a:t>Тема:</a:t>
-            </a:r>
-            <a:endParaRPr b="0" lang="ru-RU" sz="1400" spc="-1" strike="noStrike">
+            <a:endParaRPr b="0" lang="en-US" sz="5400" spc="-1" strike="noStrike">
               <a:latin typeface="Arial"/>
             </a:endParaRPr>
           </a:p>
@@ -3859,14 +3432,14 @@
       </p:grpSpPr>
       <p:sp>
         <p:nvSpPr>
-          <p:cNvPr id="50" name="Прямоугольник со скругленными углами 3"/>
+          <p:cNvPr id="49" name="Прямоугольник со скругленными углами 3"/>
           <p:cNvSpPr/>
           <p:nvPr/>
         </p:nvSpPr>
         <p:spPr>
           <a:xfrm>
             <a:off x="3507480" y="0"/>
-            <a:ext cx="5636160" cy="5143320"/>
+            <a:ext cx="5635800" cy="5142960"/>
           </a:xfrm>
           <a:prstGeom prst="roundRect">
             <a:avLst>
@@ -3915,22 +3488,22 @@
               </a:rPr>
               <a:t>PIC</a:t>
             </a:r>
-            <a:endParaRPr b="0" lang="ru-RU" sz="1800" spc="-1" strike="noStrike">
-              <a:latin typeface="Arial"/>
-            </a:endParaRPr>
-          </a:p>
-        </p:txBody>
-      </p:sp>
-      <p:sp>
-        <p:nvSpPr>
-          <p:cNvPr id="51" name="Прямоугольник: скругленные углы 2"/>
+            <a:endParaRPr b="0" lang="en-US" sz="1800" spc="-1" strike="noStrike">
+              <a:latin typeface="Arial"/>
+            </a:endParaRPr>
+          </a:p>
+        </p:txBody>
+      </p:sp>
+      <p:sp>
+        <p:nvSpPr>
+          <p:cNvPr id="50" name="Прямоугольник: скругленные углы 2"/>
           <p:cNvSpPr/>
           <p:nvPr/>
         </p:nvSpPr>
         <p:spPr>
           <a:xfrm>
             <a:off x="3722040" y="257040"/>
-            <a:ext cx="5186160" cy="4650120"/>
+            <a:ext cx="5185800" cy="4649760"/>
           </a:xfrm>
           <a:prstGeom prst="roundRect">
             <a:avLst>
@@ -3964,14 +3537,14 @@
       </p:sp>
       <p:sp>
         <p:nvSpPr>
-          <p:cNvPr id="52" name="Овал 1"/>
+          <p:cNvPr id="51" name="Овал 1"/>
           <p:cNvSpPr/>
           <p:nvPr/>
         </p:nvSpPr>
         <p:spPr>
           <a:xfrm>
             <a:off x="4122000" y="631080"/>
-            <a:ext cx="899640" cy="899640"/>
+            <a:ext cx="899280" cy="899280"/>
           </a:xfrm>
           <a:prstGeom prst="ellipse">
             <a:avLst/>
@@ -4014,25 +3587,26 @@
                   <a:srgbClr val="ffffff"/>
                 </a:solidFill>
                 <a:latin typeface="Calibri"/>
+                <a:ea typeface="DejaVu Sans"/>
               </a:rPr>
               <a:t>01</a:t>
             </a:r>
-            <a:endParaRPr b="0" lang="ru-RU" sz="1800" spc="-1" strike="noStrike">
-              <a:latin typeface="Arial"/>
-            </a:endParaRPr>
-          </a:p>
-        </p:txBody>
-      </p:sp>
-      <p:sp>
-        <p:nvSpPr>
-          <p:cNvPr id="53" name="Овал 23"/>
+            <a:endParaRPr b="0" lang="en-US" sz="1800" spc="-1" strike="noStrike">
+              <a:latin typeface="Arial"/>
+            </a:endParaRPr>
+          </a:p>
+        </p:txBody>
+      </p:sp>
+      <p:sp>
+        <p:nvSpPr>
+          <p:cNvPr id="52" name="Овал 23"/>
           <p:cNvSpPr/>
           <p:nvPr/>
         </p:nvSpPr>
         <p:spPr>
           <a:xfrm>
             <a:off x="4122000" y="2127600"/>
-            <a:ext cx="899640" cy="887760"/>
+            <a:ext cx="899280" cy="887400"/>
           </a:xfrm>
           <a:prstGeom prst="ellipse">
             <a:avLst/>
@@ -4075,25 +3649,26 @@
                   <a:srgbClr val="ffffff"/>
                 </a:solidFill>
                 <a:latin typeface="Calibri"/>
+                <a:ea typeface="DejaVu Sans"/>
               </a:rPr>
               <a:t>02</a:t>
             </a:r>
-            <a:endParaRPr b="0" lang="ru-RU" sz="1800" spc="-1" strike="noStrike">
-              <a:latin typeface="Arial"/>
-            </a:endParaRPr>
-          </a:p>
-        </p:txBody>
-      </p:sp>
-      <p:sp>
-        <p:nvSpPr>
-          <p:cNvPr id="54" name="Овал 29"/>
+            <a:endParaRPr b="0" lang="en-US" sz="1800" spc="-1" strike="noStrike">
+              <a:latin typeface="Arial"/>
+            </a:endParaRPr>
+          </a:p>
+        </p:txBody>
+      </p:sp>
+      <p:sp>
+        <p:nvSpPr>
+          <p:cNvPr id="53" name="Овал 29"/>
           <p:cNvSpPr/>
           <p:nvPr/>
         </p:nvSpPr>
         <p:spPr>
           <a:xfrm>
             <a:off x="4122000" y="3612240"/>
-            <a:ext cx="899640" cy="899640"/>
+            <a:ext cx="899280" cy="899280"/>
           </a:xfrm>
           <a:prstGeom prst="ellipse">
             <a:avLst/>
@@ -4136,25 +3711,26 @@
                   <a:srgbClr val="ffffff"/>
                 </a:solidFill>
                 <a:latin typeface="Calibri"/>
+                <a:ea typeface="DejaVu Sans"/>
               </a:rPr>
               <a:t>03</a:t>
             </a:r>
-            <a:endParaRPr b="0" lang="ru-RU" sz="1800" spc="-1" strike="noStrike">
-              <a:latin typeface="Arial"/>
-            </a:endParaRPr>
-          </a:p>
-        </p:txBody>
-      </p:sp>
-      <p:sp>
-        <p:nvSpPr>
-          <p:cNvPr id="55" name="TextBox 10"/>
+            <a:endParaRPr b="0" lang="en-US" sz="1800" spc="-1" strike="noStrike">
+              <a:latin typeface="Arial"/>
+            </a:endParaRPr>
+          </a:p>
+        </p:txBody>
+      </p:sp>
+      <p:sp>
+        <p:nvSpPr>
+          <p:cNvPr id="54" name="TextBox 10"/>
           <p:cNvSpPr/>
           <p:nvPr/>
         </p:nvSpPr>
         <p:spPr>
           <a:xfrm>
             <a:off x="5110920" y="489600"/>
-            <a:ext cx="3579120" cy="550800"/>
+            <a:ext cx="3578760" cy="550440"/>
           </a:xfrm>
           <a:prstGeom prst="rect">
             <a:avLst/>
@@ -4201,22 +3777,22 @@
               </a:rPr>
               <a:t>1</a:t>
             </a:r>
-            <a:endParaRPr b="0" lang="ru-RU" sz="1400" spc="-1" strike="noStrike">
-              <a:latin typeface="Arial"/>
-            </a:endParaRPr>
-          </a:p>
-        </p:txBody>
-      </p:sp>
-      <p:sp>
-        <p:nvSpPr>
-          <p:cNvPr id="56" name="TextBox 10"/>
+            <a:endParaRPr b="0" lang="en-US" sz="1400" spc="-1" strike="noStrike">
+              <a:latin typeface="Arial"/>
+            </a:endParaRPr>
+          </a:p>
+        </p:txBody>
+      </p:sp>
+      <p:sp>
+        <p:nvSpPr>
+          <p:cNvPr id="55" name="TextBox 10"/>
           <p:cNvSpPr/>
           <p:nvPr/>
         </p:nvSpPr>
         <p:spPr>
           <a:xfrm>
             <a:off x="5110920" y="1025280"/>
-            <a:ext cx="3579120" cy="789840"/>
+            <a:ext cx="3578760" cy="789480"/>
           </a:xfrm>
           <a:prstGeom prst="rect">
             <a:avLst/>
@@ -4263,22 +3839,22 @@
               </a:rPr>
               <a:t>1</a:t>
             </a:r>
-            <a:endParaRPr b="0" lang="ru-RU" sz="1100" spc="-1" strike="noStrike">
-              <a:latin typeface="Arial"/>
-            </a:endParaRPr>
-          </a:p>
-        </p:txBody>
-      </p:sp>
-      <p:sp>
-        <p:nvSpPr>
-          <p:cNvPr id="57" name="TextBox 10"/>
+            <a:endParaRPr b="0" lang="en-US" sz="1100" spc="-1" strike="noStrike">
+              <a:latin typeface="Arial"/>
+            </a:endParaRPr>
+          </a:p>
+        </p:txBody>
+      </p:sp>
+      <p:sp>
+        <p:nvSpPr>
+          <p:cNvPr id="56" name="TextBox 10"/>
           <p:cNvSpPr/>
           <p:nvPr/>
         </p:nvSpPr>
         <p:spPr>
           <a:xfrm>
             <a:off x="5107320" y="1985400"/>
-            <a:ext cx="3579120" cy="550800"/>
+            <a:ext cx="3578760" cy="550440"/>
           </a:xfrm>
           <a:prstGeom prst="rect">
             <a:avLst/>
@@ -4315,22 +3891,22 @@
               </a:rPr>
               <a:t>SUBTITLE2</a:t>
             </a:r>
-            <a:endParaRPr b="0" lang="ru-RU" sz="1400" spc="-1" strike="noStrike">
-              <a:latin typeface="Arial"/>
-            </a:endParaRPr>
-          </a:p>
-        </p:txBody>
-      </p:sp>
-      <p:sp>
-        <p:nvSpPr>
-          <p:cNvPr id="58" name="TextBox 10"/>
+            <a:endParaRPr b="0" lang="en-US" sz="1400" spc="-1" strike="noStrike">
+              <a:latin typeface="Arial"/>
+            </a:endParaRPr>
+          </a:p>
+        </p:txBody>
+      </p:sp>
+      <p:sp>
+        <p:nvSpPr>
+          <p:cNvPr id="57" name="TextBox 10"/>
           <p:cNvSpPr/>
           <p:nvPr/>
         </p:nvSpPr>
         <p:spPr>
           <a:xfrm>
             <a:off x="5107320" y="2517840"/>
-            <a:ext cx="3579120" cy="843480"/>
+            <a:ext cx="3578760" cy="843120"/>
           </a:xfrm>
           <a:prstGeom prst="rect">
             <a:avLst/>
@@ -4377,22 +3953,22 @@
               </a:rPr>
               <a:t>2</a:t>
             </a:r>
-            <a:endParaRPr b="0" lang="ru-RU" sz="1100" spc="-1" strike="noStrike">
-              <a:latin typeface="Arial"/>
-            </a:endParaRPr>
-          </a:p>
-        </p:txBody>
-      </p:sp>
-      <p:sp>
-        <p:nvSpPr>
-          <p:cNvPr id="59" name="TextBox 10"/>
+            <a:endParaRPr b="0" lang="en-US" sz="1100" spc="-1" strike="noStrike">
+              <a:latin typeface="Arial"/>
+            </a:endParaRPr>
+          </a:p>
+        </p:txBody>
+      </p:sp>
+      <p:sp>
+        <p:nvSpPr>
+          <p:cNvPr id="58" name="TextBox 10"/>
           <p:cNvSpPr/>
           <p:nvPr/>
         </p:nvSpPr>
         <p:spPr>
           <a:xfrm>
             <a:off x="5107320" y="3470760"/>
-            <a:ext cx="3579120" cy="550800"/>
+            <a:ext cx="3578760" cy="550440"/>
           </a:xfrm>
           <a:prstGeom prst="rect">
             <a:avLst/>
@@ -4429,22 +4005,22 @@
               </a:rPr>
               <a:t>SUBTITLE3</a:t>
             </a:r>
-            <a:endParaRPr b="0" lang="ru-RU" sz="1400" spc="-1" strike="noStrike">
-              <a:latin typeface="Arial"/>
-            </a:endParaRPr>
-          </a:p>
-        </p:txBody>
-      </p:sp>
-      <p:sp>
-        <p:nvSpPr>
-          <p:cNvPr id="60" name="TextBox 10"/>
+            <a:endParaRPr b="0" lang="en-US" sz="1400" spc="-1" strike="noStrike">
+              <a:latin typeface="Arial"/>
+            </a:endParaRPr>
+          </a:p>
+        </p:txBody>
+      </p:sp>
+      <p:sp>
+        <p:nvSpPr>
+          <p:cNvPr id="59" name="TextBox 10"/>
           <p:cNvSpPr/>
           <p:nvPr/>
         </p:nvSpPr>
         <p:spPr>
           <a:xfrm>
             <a:off x="5107320" y="4003560"/>
-            <a:ext cx="3579120" cy="794880"/>
+            <a:ext cx="3578760" cy="794520"/>
           </a:xfrm>
           <a:prstGeom prst="rect">
             <a:avLst/>
@@ -4491,22 +4067,22 @@
               </a:rPr>
               <a:t>3</a:t>
             </a:r>
-            <a:endParaRPr b="0" lang="ru-RU" sz="1100" spc="-1" strike="noStrike">
-              <a:latin typeface="Arial"/>
-            </a:endParaRPr>
-          </a:p>
-        </p:txBody>
-      </p:sp>
-      <p:sp>
-        <p:nvSpPr>
-          <p:cNvPr id="61" name="TextBox 13"/>
+            <a:endParaRPr b="0" lang="en-US" sz="1100" spc="-1" strike="noStrike">
+              <a:latin typeface="Arial"/>
+            </a:endParaRPr>
+          </a:p>
+        </p:txBody>
+      </p:sp>
+      <p:sp>
+        <p:nvSpPr>
+          <p:cNvPr id="60" name="TextBox 13"/>
           <p:cNvSpPr/>
           <p:nvPr/>
         </p:nvSpPr>
         <p:spPr>
           <a:xfrm>
             <a:off x="165960" y="200880"/>
-            <a:ext cx="3148200" cy="1842120"/>
+            <a:ext cx="3147840" cy="1841760"/>
           </a:xfrm>
           <a:prstGeom prst="rect">
             <a:avLst/>
@@ -4539,10 +4115,11 @@
                   <a:srgbClr val="ffffff"/>
                 </a:solidFill>
                 <a:latin typeface="Arial"/>
+                <a:ea typeface="DejaVu Sans"/>
               </a:rPr>
               <a:t>TITLE</a:t>
             </a:r>
-            <a:endParaRPr b="0" lang="ru-RU" sz="2200" spc="-1" strike="noStrike">
+            <a:endParaRPr b="0" lang="en-US" sz="2200" spc="-1" strike="noStrike">
               <a:latin typeface="Arial"/>
             </a:endParaRPr>
           </a:p>
@@ -4587,14 +4164,14 @@
       </p:grpSpPr>
       <p:sp>
         <p:nvSpPr>
-          <p:cNvPr id="62" name="Прямоугольник со скругленными углами 3"/>
+          <p:cNvPr id="61" name="Прямоугольник со скругленными углами 3"/>
           <p:cNvSpPr/>
           <p:nvPr/>
         </p:nvSpPr>
         <p:spPr>
           <a:xfrm>
             <a:off x="0" y="0"/>
-            <a:ext cx="9143640" cy="1961640"/>
+            <a:ext cx="9143280" cy="1961280"/>
           </a:xfrm>
           <a:prstGeom prst="roundRect">
             <a:avLst>
@@ -4645,22 +4222,22 @@
               </a:rPr>
               <a:t>PIC</a:t>
             </a:r>
-            <a:endParaRPr b="0" lang="ru-RU" sz="1800" spc="-1" strike="noStrike">
-              <a:latin typeface="Arial"/>
-            </a:endParaRPr>
-          </a:p>
-        </p:txBody>
-      </p:sp>
-      <p:sp>
-        <p:nvSpPr>
-          <p:cNvPr id="63" name="TextBox 10"/>
+            <a:endParaRPr b="0" lang="en-US" sz="1800" spc="-1" strike="noStrike">
+              <a:latin typeface="Arial"/>
+            </a:endParaRPr>
+          </a:p>
+        </p:txBody>
+      </p:sp>
+      <p:sp>
+        <p:nvSpPr>
+          <p:cNvPr id="62" name="TextBox 10"/>
           <p:cNvSpPr/>
           <p:nvPr/>
         </p:nvSpPr>
         <p:spPr>
           <a:xfrm>
             <a:off x="384840" y="2571840"/>
-            <a:ext cx="2665080" cy="713880"/>
+            <a:ext cx="2664720" cy="713520"/>
           </a:xfrm>
           <a:prstGeom prst="rect">
             <a:avLst/>
@@ -4697,22 +4274,22 @@
               </a:rPr>
               <a:t>SUBTITLE1</a:t>
             </a:r>
-            <a:endParaRPr b="0" lang="ru-RU" sz="1400" spc="-1" strike="noStrike">
-              <a:latin typeface="Arial"/>
-            </a:endParaRPr>
-          </a:p>
-        </p:txBody>
-      </p:sp>
-      <p:sp>
-        <p:nvSpPr>
-          <p:cNvPr id="64" name="TextBox 10"/>
+            <a:endParaRPr b="0" lang="en-US" sz="1400" spc="-1" strike="noStrike">
+              <a:latin typeface="Arial"/>
+            </a:endParaRPr>
+          </a:p>
+        </p:txBody>
+      </p:sp>
+      <p:sp>
+        <p:nvSpPr>
+          <p:cNvPr id="63" name="TextBox 10"/>
           <p:cNvSpPr/>
           <p:nvPr/>
         </p:nvSpPr>
         <p:spPr>
           <a:xfrm>
             <a:off x="384840" y="3356280"/>
-            <a:ext cx="2665080" cy="1565280"/>
+            <a:ext cx="2664720" cy="1564920"/>
           </a:xfrm>
           <a:prstGeom prst="rect">
             <a:avLst/>
@@ -4759,22 +4336,22 @@
               </a:rPr>
               <a:t>1</a:t>
             </a:r>
-            <a:endParaRPr b="0" lang="ru-RU" sz="1100" spc="-1" strike="noStrike">
-              <a:latin typeface="Arial"/>
-            </a:endParaRPr>
-          </a:p>
-        </p:txBody>
-      </p:sp>
-      <p:sp>
-        <p:nvSpPr>
-          <p:cNvPr id="65" name="TextBox 10"/>
+            <a:endParaRPr b="0" lang="en-US" sz="1100" spc="-1" strike="noStrike">
+              <a:latin typeface="Arial"/>
+            </a:endParaRPr>
+          </a:p>
+        </p:txBody>
+      </p:sp>
+      <p:sp>
+        <p:nvSpPr>
+          <p:cNvPr id="64" name="TextBox 10"/>
           <p:cNvSpPr/>
           <p:nvPr/>
         </p:nvSpPr>
         <p:spPr>
           <a:xfrm>
             <a:off x="3239280" y="2571840"/>
-            <a:ext cx="2665080" cy="713880"/>
+            <a:ext cx="2664720" cy="713520"/>
           </a:xfrm>
           <a:prstGeom prst="rect">
             <a:avLst/>
@@ -4811,22 +4388,22 @@
               </a:rPr>
               <a:t>SUBTITLE2</a:t>
             </a:r>
-            <a:endParaRPr b="0" lang="ru-RU" sz="1400" spc="-1" strike="noStrike">
-              <a:latin typeface="Arial"/>
-            </a:endParaRPr>
-          </a:p>
-        </p:txBody>
-      </p:sp>
-      <p:sp>
-        <p:nvSpPr>
-          <p:cNvPr id="66" name="TextBox 10"/>
+            <a:endParaRPr b="0" lang="en-US" sz="1400" spc="-1" strike="noStrike">
+              <a:latin typeface="Arial"/>
+            </a:endParaRPr>
+          </a:p>
+        </p:txBody>
+      </p:sp>
+      <p:sp>
+        <p:nvSpPr>
+          <p:cNvPr id="65" name="TextBox 10"/>
           <p:cNvSpPr/>
           <p:nvPr/>
         </p:nvSpPr>
         <p:spPr>
           <a:xfrm>
             <a:off x="3239280" y="3356280"/>
-            <a:ext cx="2665080" cy="1565280"/>
+            <a:ext cx="2664720" cy="1564920"/>
           </a:xfrm>
           <a:prstGeom prst="rect">
             <a:avLst/>
@@ -4873,22 +4450,22 @@
               </a:rPr>
               <a:t>2</a:t>
             </a:r>
-            <a:endParaRPr b="0" lang="ru-RU" sz="1100" spc="-1" strike="noStrike">
-              <a:latin typeface="Arial"/>
-            </a:endParaRPr>
-          </a:p>
-        </p:txBody>
-      </p:sp>
-      <p:sp>
-        <p:nvSpPr>
-          <p:cNvPr id="67" name="TextBox 10"/>
+            <a:endParaRPr b="0" lang="en-US" sz="1100" spc="-1" strike="noStrike">
+              <a:latin typeface="Arial"/>
+            </a:endParaRPr>
+          </a:p>
+        </p:txBody>
+      </p:sp>
+      <p:sp>
+        <p:nvSpPr>
+          <p:cNvPr id="66" name="TextBox 10"/>
           <p:cNvSpPr/>
           <p:nvPr/>
         </p:nvSpPr>
         <p:spPr>
           <a:xfrm>
             <a:off x="6093720" y="2571840"/>
-            <a:ext cx="2665080" cy="713880"/>
+            <a:ext cx="2664720" cy="713520"/>
           </a:xfrm>
           <a:prstGeom prst="rect">
             <a:avLst/>
@@ -4925,22 +4502,22 @@
               </a:rPr>
               <a:t>SUBTITLE3</a:t>
             </a:r>
-            <a:endParaRPr b="0" lang="ru-RU" sz="1400" spc="-1" strike="noStrike">
-              <a:latin typeface="Arial"/>
-            </a:endParaRPr>
-          </a:p>
-        </p:txBody>
-      </p:sp>
-      <p:sp>
-        <p:nvSpPr>
-          <p:cNvPr id="68" name="TextBox 10"/>
+            <a:endParaRPr b="0" lang="en-US" sz="1400" spc="-1" strike="noStrike">
+              <a:latin typeface="Arial"/>
+            </a:endParaRPr>
+          </a:p>
+        </p:txBody>
+      </p:sp>
+      <p:sp>
+        <p:nvSpPr>
+          <p:cNvPr id="67" name="TextBox 10"/>
           <p:cNvSpPr/>
           <p:nvPr/>
         </p:nvSpPr>
         <p:spPr>
           <a:xfrm>
             <a:off x="6093720" y="3356280"/>
-            <a:ext cx="2665080" cy="1565280"/>
+            <a:ext cx="2664720" cy="1564920"/>
           </a:xfrm>
           <a:prstGeom prst="rect">
             <a:avLst/>
@@ -4987,22 +4564,22 @@
               </a:rPr>
               <a:t>3</a:t>
             </a:r>
-            <a:endParaRPr b="0" lang="ru-RU" sz="1100" spc="-1" strike="noStrike">
-              <a:latin typeface="Arial"/>
-            </a:endParaRPr>
-          </a:p>
-        </p:txBody>
-      </p:sp>
-      <p:sp>
-        <p:nvSpPr>
-          <p:cNvPr id="69" name="TextBox 9"/>
+            <a:endParaRPr b="0" lang="en-US" sz="1100" spc="-1" strike="noStrike">
+              <a:latin typeface="Arial"/>
+            </a:endParaRPr>
+          </a:p>
+        </p:txBody>
+      </p:sp>
+      <p:sp>
+        <p:nvSpPr>
+          <p:cNvPr id="68" name="TextBox 9"/>
           <p:cNvSpPr/>
           <p:nvPr/>
         </p:nvSpPr>
         <p:spPr>
           <a:xfrm>
             <a:off x="384840" y="2178000"/>
-            <a:ext cx="8465760" cy="480960"/>
+            <a:ext cx="8465400" cy="480600"/>
           </a:xfrm>
           <a:prstGeom prst="rect">
             <a:avLst/>
@@ -5035,10 +4612,11 @@
                   <a:srgbClr val="ffffff"/>
                 </a:solidFill>
                 <a:latin typeface="Arial"/>
+                <a:ea typeface="DejaVu Sans"/>
               </a:rPr>
               <a:t>TITLE</a:t>
             </a:r>
-            <a:endParaRPr b="0" lang="ru-RU" sz="2200" spc="-1" strike="noStrike">
+            <a:endParaRPr b="0" lang="en-US" sz="2200" spc="-1" strike="noStrike">
               <a:latin typeface="Arial"/>
             </a:endParaRPr>
           </a:p>
@@ -5083,14 +4661,14 @@
       </p:grpSpPr>
       <p:sp>
         <p:nvSpPr>
-          <p:cNvPr id="70" name="Прямоугольник: скругленные углы 15"/>
+          <p:cNvPr id="69" name="Прямоугольник: скругленные углы 15"/>
           <p:cNvSpPr/>
           <p:nvPr/>
         </p:nvSpPr>
         <p:spPr>
           <a:xfrm>
             <a:off x="4636440" y="250200"/>
-            <a:ext cx="4198320" cy="4625280"/>
+            <a:ext cx="4197960" cy="4624920"/>
           </a:xfrm>
           <a:prstGeom prst="roundRect">
             <a:avLst>
@@ -5137,25 +4715,26 @@
                   <a:srgbClr val="ffffff"/>
                 </a:solidFill>
                 <a:latin typeface="Calibri"/>
+                <a:ea typeface="DejaVu Sans"/>
               </a:rPr>
               <a:t>PIC</a:t>
             </a:r>
-            <a:endParaRPr b="0" lang="ru-RU" sz="1800" spc="-1" strike="noStrike">
-              <a:latin typeface="Arial"/>
-            </a:endParaRPr>
-          </a:p>
-        </p:txBody>
-      </p:sp>
-      <p:sp>
-        <p:nvSpPr>
-          <p:cNvPr id="71" name="Прямоугольник: скругленные углы 16"/>
+            <a:endParaRPr b="0" lang="en-US" sz="1800" spc="-1" strike="noStrike">
+              <a:latin typeface="Arial"/>
+            </a:endParaRPr>
+          </a:p>
+        </p:txBody>
+      </p:sp>
+      <p:sp>
+        <p:nvSpPr>
+          <p:cNvPr id="70" name="Прямоугольник: скругленные углы 16"/>
           <p:cNvSpPr/>
           <p:nvPr/>
         </p:nvSpPr>
         <p:spPr>
           <a:xfrm>
             <a:off x="329400" y="257040"/>
-            <a:ext cx="4198320" cy="4625280"/>
+            <a:ext cx="4197960" cy="4624920"/>
           </a:xfrm>
           <a:prstGeom prst="roundRect">
             <a:avLst>
@@ -5189,14 +4768,14 @@
       </p:sp>
       <p:sp>
         <p:nvSpPr>
-          <p:cNvPr id="72" name="Овал 9"/>
+          <p:cNvPr id="71" name="Овал 9"/>
           <p:cNvSpPr/>
           <p:nvPr/>
         </p:nvSpPr>
         <p:spPr>
           <a:xfrm>
             <a:off x="4272120" y="1193040"/>
-            <a:ext cx="635400" cy="635400"/>
+            <a:ext cx="635040" cy="635040"/>
           </a:xfrm>
           <a:prstGeom prst="ellipse">
             <a:avLst/>
@@ -5225,14 +4804,14 @@
       </p:sp>
       <p:sp>
         <p:nvSpPr>
-          <p:cNvPr id="73" name="TextBox 10"/>
+          <p:cNvPr id="72" name="TextBox 10"/>
           <p:cNvSpPr/>
           <p:nvPr/>
         </p:nvSpPr>
         <p:spPr>
           <a:xfrm>
             <a:off x="581760" y="828720"/>
-            <a:ext cx="3693600" cy="550800"/>
+            <a:ext cx="3693240" cy="550440"/>
           </a:xfrm>
           <a:prstGeom prst="rect">
             <a:avLst/>
@@ -5279,22 +4858,22 @@
               </a:rPr>
               <a:t>1</a:t>
             </a:r>
-            <a:endParaRPr b="0" lang="ru-RU" sz="1400" spc="-1" strike="noStrike">
-              <a:latin typeface="Arial"/>
-            </a:endParaRPr>
-          </a:p>
-        </p:txBody>
-      </p:sp>
-      <p:sp>
-        <p:nvSpPr>
-          <p:cNvPr id="74" name="TextBox 10"/>
+            <a:endParaRPr b="0" lang="en-US" sz="1400" spc="-1" strike="noStrike">
+              <a:latin typeface="Arial"/>
+            </a:endParaRPr>
+          </a:p>
+        </p:txBody>
+      </p:sp>
+      <p:sp>
+        <p:nvSpPr>
+          <p:cNvPr id="73" name="TextBox 10"/>
           <p:cNvSpPr/>
           <p:nvPr/>
         </p:nvSpPr>
         <p:spPr>
           <a:xfrm>
             <a:off x="581760" y="1364400"/>
-            <a:ext cx="3693600" cy="789840"/>
+            <a:ext cx="3693240" cy="789480"/>
           </a:xfrm>
           <a:prstGeom prst="rect">
             <a:avLst/>
@@ -5341,22 +4920,22 @@
               </a:rPr>
               <a:t>1</a:t>
             </a:r>
-            <a:endParaRPr b="0" lang="ru-RU" sz="1100" spc="-1" strike="noStrike">
-              <a:latin typeface="Arial"/>
-            </a:endParaRPr>
-          </a:p>
-        </p:txBody>
-      </p:sp>
-      <p:sp>
-        <p:nvSpPr>
-          <p:cNvPr id="75" name="TextBox 10"/>
+            <a:endParaRPr b="0" lang="en-US" sz="1100" spc="-1" strike="noStrike">
+              <a:latin typeface="Arial"/>
+            </a:endParaRPr>
+          </a:p>
+        </p:txBody>
+      </p:sp>
+      <p:sp>
+        <p:nvSpPr>
+          <p:cNvPr id="74" name="TextBox 10"/>
           <p:cNvSpPr/>
           <p:nvPr/>
         </p:nvSpPr>
         <p:spPr>
           <a:xfrm>
             <a:off x="578160" y="2154600"/>
-            <a:ext cx="3693600" cy="550800"/>
+            <a:ext cx="3693240" cy="550440"/>
           </a:xfrm>
           <a:prstGeom prst="rect">
             <a:avLst/>
@@ -5393,22 +4972,22 @@
               </a:rPr>
               <a:t>SUBTITLE2</a:t>
             </a:r>
-            <a:endParaRPr b="0" lang="ru-RU" sz="1400" spc="-1" strike="noStrike">
-              <a:latin typeface="Arial"/>
-            </a:endParaRPr>
-          </a:p>
-        </p:txBody>
-      </p:sp>
-      <p:sp>
-        <p:nvSpPr>
-          <p:cNvPr id="76" name="TextBox 10"/>
+            <a:endParaRPr b="0" lang="en-US" sz="1400" spc="-1" strike="noStrike">
+              <a:latin typeface="Arial"/>
+            </a:endParaRPr>
+          </a:p>
+        </p:txBody>
+      </p:sp>
+      <p:sp>
+        <p:nvSpPr>
+          <p:cNvPr id="75" name="TextBox 10"/>
           <p:cNvSpPr/>
           <p:nvPr/>
         </p:nvSpPr>
         <p:spPr>
           <a:xfrm>
             <a:off x="578160" y="2687040"/>
-            <a:ext cx="3693600" cy="843480"/>
+            <a:ext cx="3693240" cy="843120"/>
           </a:xfrm>
           <a:prstGeom prst="rect">
             <a:avLst/>
@@ -5455,22 +5034,22 @@
               </a:rPr>
               <a:t>2</a:t>
             </a:r>
-            <a:endParaRPr b="0" lang="ru-RU" sz="1100" spc="-1" strike="noStrike">
-              <a:latin typeface="Arial"/>
-            </a:endParaRPr>
-          </a:p>
-        </p:txBody>
-      </p:sp>
-      <p:sp>
-        <p:nvSpPr>
-          <p:cNvPr id="77" name="TextBox 10"/>
+            <a:endParaRPr b="0" lang="en-US" sz="1100" spc="-1" strike="noStrike">
+              <a:latin typeface="Arial"/>
+            </a:endParaRPr>
+          </a:p>
+        </p:txBody>
+      </p:sp>
+      <p:sp>
+        <p:nvSpPr>
+          <p:cNvPr id="76" name="TextBox 10"/>
           <p:cNvSpPr/>
           <p:nvPr/>
         </p:nvSpPr>
         <p:spPr>
           <a:xfrm>
             <a:off x="578160" y="3482280"/>
-            <a:ext cx="3693600" cy="550800"/>
+            <a:ext cx="3693240" cy="550440"/>
           </a:xfrm>
           <a:prstGeom prst="rect">
             <a:avLst/>
@@ -5507,22 +5086,22 @@
               </a:rPr>
               <a:t>SUBTITLE3</a:t>
             </a:r>
-            <a:endParaRPr b="0" lang="ru-RU" sz="1400" spc="-1" strike="noStrike">
-              <a:latin typeface="Arial"/>
-            </a:endParaRPr>
-          </a:p>
-        </p:txBody>
-      </p:sp>
-      <p:sp>
-        <p:nvSpPr>
-          <p:cNvPr id="78" name="TextBox 10"/>
+            <a:endParaRPr b="0" lang="en-US" sz="1400" spc="-1" strike="noStrike">
+              <a:latin typeface="Arial"/>
+            </a:endParaRPr>
+          </a:p>
+        </p:txBody>
+      </p:sp>
+      <p:sp>
+        <p:nvSpPr>
+          <p:cNvPr id="77" name="TextBox 10"/>
           <p:cNvSpPr/>
           <p:nvPr/>
         </p:nvSpPr>
         <p:spPr>
           <a:xfrm>
             <a:off x="578160" y="4015080"/>
-            <a:ext cx="3693600" cy="794880"/>
+            <a:ext cx="3693240" cy="794520"/>
           </a:xfrm>
           <a:prstGeom prst="rect">
             <a:avLst/>
@@ -5569,22 +5148,22 @@
               </a:rPr>
               <a:t>3</a:t>
             </a:r>
-            <a:endParaRPr b="0" lang="ru-RU" sz="1100" spc="-1" strike="noStrike">
-              <a:latin typeface="Arial"/>
-            </a:endParaRPr>
-          </a:p>
-        </p:txBody>
-      </p:sp>
-      <p:sp>
-        <p:nvSpPr>
-          <p:cNvPr id="79" name="TextBox 30"/>
+            <a:endParaRPr b="0" lang="en-US" sz="1100" spc="-1" strike="noStrike">
+              <a:latin typeface="Arial"/>
+            </a:endParaRPr>
+          </a:p>
+        </p:txBody>
+      </p:sp>
+      <p:sp>
+        <p:nvSpPr>
+          <p:cNvPr id="78" name="TextBox 30"/>
           <p:cNvSpPr/>
           <p:nvPr/>
         </p:nvSpPr>
         <p:spPr>
           <a:xfrm>
             <a:off x="553680" y="352440"/>
-            <a:ext cx="3803760" cy="789840"/>
+            <a:ext cx="3803400" cy="789480"/>
           </a:xfrm>
           <a:prstGeom prst="rect">
             <a:avLst/>
@@ -5617,10 +5196,11 @@
                   <a:srgbClr val="ffffff"/>
                 </a:solidFill>
                 <a:latin typeface="Arial"/>
+                <a:ea typeface="DejaVu Sans"/>
               </a:rPr>
               <a:t>TITLE</a:t>
             </a:r>
-            <a:endParaRPr b="0" lang="ru-RU" sz="2200" spc="-1" strike="noStrike">
+            <a:endParaRPr b="0" lang="en-US" sz="2200" spc="-1" strike="noStrike">
               <a:latin typeface="Arial"/>
             </a:endParaRPr>
           </a:p>
@@ -5665,14 +5245,14 @@
       </p:grpSpPr>
       <p:sp>
         <p:nvSpPr>
-          <p:cNvPr id="80" name="TextBox 20"/>
+          <p:cNvPr id="79" name="TextBox 20"/>
           <p:cNvSpPr/>
           <p:nvPr/>
         </p:nvSpPr>
         <p:spPr>
           <a:xfrm>
             <a:off x="516960" y="411840"/>
-            <a:ext cx="8465760" cy="480960"/>
+            <a:ext cx="8465400" cy="480600"/>
           </a:xfrm>
           <a:prstGeom prst="rect">
             <a:avLst/>
@@ -5705,25 +5285,26 @@
                   <a:srgbClr val="ffffff"/>
                 </a:solidFill>
                 <a:latin typeface="Arial"/>
+                <a:ea typeface="DejaVu Sans"/>
               </a:rPr>
               <a:t>TITLE</a:t>
             </a:r>
-            <a:endParaRPr b="0" lang="ru-RU" sz="2200" spc="-1" strike="noStrike">
-              <a:latin typeface="Arial"/>
-            </a:endParaRPr>
-          </a:p>
-        </p:txBody>
-      </p:sp>
-      <p:sp>
-        <p:nvSpPr>
-          <p:cNvPr id="81" name="Прямоугольник со скругленными углами 3"/>
+            <a:endParaRPr b="0" lang="en-US" sz="2200" spc="-1" strike="noStrike">
+              <a:latin typeface="Arial"/>
+            </a:endParaRPr>
+          </a:p>
+        </p:txBody>
+      </p:sp>
+      <p:sp>
+        <p:nvSpPr>
+          <p:cNvPr id="80" name="Прямоугольник со скругленными углами 3"/>
           <p:cNvSpPr/>
           <p:nvPr/>
         </p:nvSpPr>
         <p:spPr>
           <a:xfrm>
             <a:off x="456480" y="1406160"/>
-            <a:ext cx="2300760" cy="1440000"/>
+            <a:ext cx="2300400" cy="1439640"/>
           </a:xfrm>
           <a:prstGeom prst="roundRect">
             <a:avLst>
@@ -5774,22 +5355,22 @@
               </a:rPr>
               <a:t>PIC</a:t>
             </a:r>
-            <a:endParaRPr b="0" lang="ru-RU" sz="1800" spc="-1" strike="noStrike">
-              <a:latin typeface="Arial"/>
-            </a:endParaRPr>
-          </a:p>
-        </p:txBody>
-      </p:sp>
-      <p:sp>
-        <p:nvSpPr>
-          <p:cNvPr id="82" name="TextBox 10"/>
+            <a:endParaRPr b="0" lang="en-US" sz="1800" spc="-1" strike="noStrike">
+              <a:latin typeface="Arial"/>
+            </a:endParaRPr>
+          </a:p>
+        </p:txBody>
+      </p:sp>
+      <p:sp>
+        <p:nvSpPr>
+          <p:cNvPr id="81" name="TextBox 10"/>
           <p:cNvSpPr/>
           <p:nvPr/>
         </p:nvSpPr>
         <p:spPr>
           <a:xfrm>
             <a:off x="384840" y="3013560"/>
-            <a:ext cx="2429280" cy="713880"/>
+            <a:ext cx="2428920" cy="713520"/>
           </a:xfrm>
           <a:prstGeom prst="rect">
             <a:avLst/>
@@ -5826,22 +5407,22 @@
               </a:rPr>
               <a:t>SUBTITLE1</a:t>
             </a:r>
-            <a:endParaRPr b="0" lang="ru-RU" sz="1400" spc="-1" strike="noStrike">
-              <a:latin typeface="Arial"/>
-            </a:endParaRPr>
-          </a:p>
-        </p:txBody>
-      </p:sp>
-      <p:sp>
-        <p:nvSpPr>
-          <p:cNvPr id="83" name="TextBox 10"/>
+            <a:endParaRPr b="0" lang="en-US" sz="1400" spc="-1" strike="noStrike">
+              <a:latin typeface="Arial"/>
+            </a:endParaRPr>
+          </a:p>
+        </p:txBody>
+      </p:sp>
+      <p:sp>
+        <p:nvSpPr>
+          <p:cNvPr id="82" name="TextBox 10"/>
           <p:cNvSpPr/>
           <p:nvPr/>
         </p:nvSpPr>
         <p:spPr>
           <a:xfrm>
             <a:off x="384840" y="3798000"/>
-            <a:ext cx="2429280" cy="1037880"/>
+            <a:ext cx="2428920" cy="1037520"/>
           </a:xfrm>
           <a:prstGeom prst="rect">
             <a:avLst/>
@@ -5888,22 +5469,22 @@
               </a:rPr>
               <a:t>1</a:t>
             </a:r>
-            <a:endParaRPr b="0" lang="ru-RU" sz="1100" spc="-1" strike="noStrike">
-              <a:latin typeface="Arial"/>
-            </a:endParaRPr>
-          </a:p>
-        </p:txBody>
-      </p:sp>
-      <p:sp>
-        <p:nvSpPr>
-          <p:cNvPr id="84" name="Прямоугольник: скругленные углы 1"/>
+            <a:endParaRPr b="0" lang="en-US" sz="1100" spc="-1" strike="noStrike">
+              <a:latin typeface="Arial"/>
+            </a:endParaRPr>
+          </a:p>
+        </p:txBody>
+      </p:sp>
+      <p:sp>
+        <p:nvSpPr>
+          <p:cNvPr id="83" name="Прямоугольник: скругленные углы 1"/>
           <p:cNvSpPr/>
           <p:nvPr/>
         </p:nvSpPr>
         <p:spPr>
           <a:xfrm>
             <a:off x="328680" y="228600"/>
-            <a:ext cx="8501400" cy="813960"/>
+            <a:ext cx="8501040" cy="813600"/>
           </a:xfrm>
           <a:prstGeom prst="roundRect">
             <a:avLst>
@@ -5934,14 +5515,14 @@
       </p:sp>
       <p:sp>
         <p:nvSpPr>
-          <p:cNvPr id="85" name="Прямоугольник: скругленные углы 10"/>
+          <p:cNvPr id="84" name="Прямоугольник: скругленные углы 10"/>
           <p:cNvSpPr/>
           <p:nvPr/>
         </p:nvSpPr>
         <p:spPr>
           <a:xfrm>
             <a:off x="328680" y="1279080"/>
-            <a:ext cx="2557080" cy="3642840"/>
+            <a:ext cx="2556720" cy="3642480"/>
           </a:xfrm>
           <a:prstGeom prst="roundRect">
             <a:avLst>
@@ -5972,14 +5553,14 @@
       </p:sp>
       <p:sp>
         <p:nvSpPr>
-          <p:cNvPr id="86" name="Прямоугольник со скругленными углами 3"/>
+          <p:cNvPr id="85" name="Прямоугольник со скругленными углами 3"/>
           <p:cNvSpPr/>
           <p:nvPr/>
         </p:nvSpPr>
         <p:spPr>
           <a:xfrm>
             <a:off x="3421080" y="1398960"/>
-            <a:ext cx="2300760" cy="1440000"/>
+            <a:ext cx="2300400" cy="1439640"/>
           </a:xfrm>
           <a:prstGeom prst="roundRect">
             <a:avLst>
@@ -6030,22 +5611,22 @@
               </a:rPr>
               <a:t>PIC</a:t>
             </a:r>
-            <a:endParaRPr b="0" lang="ru-RU" sz="1800" spc="-1" strike="noStrike">
-              <a:latin typeface="Arial"/>
-            </a:endParaRPr>
-          </a:p>
-        </p:txBody>
-      </p:sp>
-      <p:sp>
-        <p:nvSpPr>
-          <p:cNvPr id="87" name="TextBox 10"/>
+            <a:endParaRPr b="0" lang="en-US" sz="1800" spc="-1" strike="noStrike">
+              <a:latin typeface="Arial"/>
+            </a:endParaRPr>
+          </a:p>
+        </p:txBody>
+      </p:sp>
+      <p:sp>
+        <p:nvSpPr>
+          <p:cNvPr id="86" name="TextBox 10"/>
           <p:cNvSpPr/>
           <p:nvPr/>
         </p:nvSpPr>
         <p:spPr>
           <a:xfrm>
             <a:off x="3349440" y="3013560"/>
-            <a:ext cx="2429280" cy="713880"/>
+            <a:ext cx="2428920" cy="713520"/>
           </a:xfrm>
           <a:prstGeom prst="rect">
             <a:avLst/>
@@ -6092,22 +5673,22 @@
               </a:rPr>
               <a:t>2</a:t>
             </a:r>
-            <a:endParaRPr b="0" lang="ru-RU" sz="1400" spc="-1" strike="noStrike">
-              <a:latin typeface="Arial"/>
-            </a:endParaRPr>
-          </a:p>
-        </p:txBody>
-      </p:sp>
-      <p:sp>
-        <p:nvSpPr>
-          <p:cNvPr id="88" name="TextBox 10"/>
+            <a:endParaRPr b="0" lang="en-US" sz="1400" spc="-1" strike="noStrike">
+              <a:latin typeface="Arial"/>
+            </a:endParaRPr>
+          </a:p>
+        </p:txBody>
+      </p:sp>
+      <p:sp>
+        <p:nvSpPr>
+          <p:cNvPr id="87" name="TextBox 10"/>
           <p:cNvSpPr/>
           <p:nvPr/>
         </p:nvSpPr>
         <p:spPr>
           <a:xfrm>
             <a:off x="3349440" y="3798000"/>
-            <a:ext cx="2429280" cy="1037880"/>
+            <a:ext cx="2428920" cy="1037520"/>
           </a:xfrm>
           <a:prstGeom prst="rect">
             <a:avLst/>
@@ -6154,22 +5735,22 @@
               </a:rPr>
               <a:t>2</a:t>
             </a:r>
-            <a:endParaRPr b="0" lang="ru-RU" sz="1100" spc="-1" strike="noStrike">
-              <a:latin typeface="Arial"/>
-            </a:endParaRPr>
-          </a:p>
-        </p:txBody>
-      </p:sp>
-      <p:sp>
-        <p:nvSpPr>
-          <p:cNvPr id="89" name="Прямоугольник: скругленные углы 14"/>
+            <a:endParaRPr b="0" lang="en-US" sz="1100" spc="-1" strike="noStrike">
+              <a:latin typeface="Arial"/>
+            </a:endParaRPr>
+          </a:p>
+        </p:txBody>
+      </p:sp>
+      <p:sp>
+        <p:nvSpPr>
+          <p:cNvPr id="88" name="Прямоугольник: скругленные углы 14"/>
           <p:cNvSpPr/>
           <p:nvPr/>
         </p:nvSpPr>
         <p:spPr>
           <a:xfrm>
             <a:off x="3293280" y="1271880"/>
-            <a:ext cx="2557080" cy="3642840"/>
+            <a:ext cx="2556720" cy="3642480"/>
           </a:xfrm>
           <a:prstGeom prst="roundRect">
             <a:avLst>
@@ -6200,14 +5781,14 @@
       </p:sp>
       <p:sp>
         <p:nvSpPr>
-          <p:cNvPr id="90" name="Прямоугольник со скругленными углами 3"/>
+          <p:cNvPr id="89" name="Прямоугольник со скругленными углами 3"/>
           <p:cNvSpPr/>
           <p:nvPr/>
         </p:nvSpPr>
         <p:spPr>
           <a:xfrm>
             <a:off x="6400800" y="1379520"/>
-            <a:ext cx="2300760" cy="1440000"/>
+            <a:ext cx="2300400" cy="1439640"/>
           </a:xfrm>
           <a:prstGeom prst="roundRect">
             <a:avLst>
@@ -6258,22 +5839,22 @@
               </a:rPr>
               <a:t>PIC</a:t>
             </a:r>
-            <a:endParaRPr b="0" lang="ru-RU" sz="1800" spc="-1" strike="noStrike">
-              <a:latin typeface="Arial"/>
-            </a:endParaRPr>
-          </a:p>
-        </p:txBody>
-      </p:sp>
-      <p:sp>
-        <p:nvSpPr>
-          <p:cNvPr id="91" name="TextBox 10"/>
+            <a:endParaRPr b="0" lang="en-US" sz="1800" spc="-1" strike="noStrike">
+              <a:latin typeface="Arial"/>
+            </a:endParaRPr>
+          </a:p>
+        </p:txBody>
+      </p:sp>
+      <p:sp>
+        <p:nvSpPr>
+          <p:cNvPr id="90" name="TextBox 10"/>
           <p:cNvSpPr/>
           <p:nvPr/>
         </p:nvSpPr>
         <p:spPr>
           <a:xfrm>
             <a:off x="6329520" y="3013560"/>
-            <a:ext cx="2429280" cy="713880"/>
+            <a:ext cx="2428920" cy="713520"/>
           </a:xfrm>
           <a:prstGeom prst="rect">
             <a:avLst/>
@@ -6320,22 +5901,22 @@
               </a:rPr>
               <a:t>3</a:t>
             </a:r>
-            <a:endParaRPr b="0" lang="ru-RU" sz="1400" spc="-1" strike="noStrike">
-              <a:latin typeface="Arial"/>
-            </a:endParaRPr>
-          </a:p>
-        </p:txBody>
-      </p:sp>
-      <p:sp>
-        <p:nvSpPr>
-          <p:cNvPr id="92" name="TextBox 10"/>
+            <a:endParaRPr b="0" lang="en-US" sz="1400" spc="-1" strike="noStrike">
+              <a:latin typeface="Arial"/>
+            </a:endParaRPr>
+          </a:p>
+        </p:txBody>
+      </p:sp>
+      <p:sp>
+        <p:nvSpPr>
+          <p:cNvPr id="91" name="TextBox 10"/>
           <p:cNvSpPr/>
           <p:nvPr/>
         </p:nvSpPr>
         <p:spPr>
           <a:xfrm>
             <a:off x="6329520" y="3798000"/>
-            <a:ext cx="2429280" cy="1037880"/>
+            <a:ext cx="2428920" cy="1037520"/>
           </a:xfrm>
           <a:prstGeom prst="rect">
             <a:avLst/>
@@ -6382,22 +5963,22 @@
               </a:rPr>
               <a:t>3</a:t>
             </a:r>
-            <a:endParaRPr b="0" lang="ru-RU" sz="1100" spc="-1" strike="noStrike">
-              <a:latin typeface="Arial"/>
-            </a:endParaRPr>
-          </a:p>
-        </p:txBody>
-      </p:sp>
-      <p:sp>
-        <p:nvSpPr>
-          <p:cNvPr id="93" name="Прямоугольник: скругленные углы 19"/>
+            <a:endParaRPr b="0" lang="en-US" sz="1100" spc="-1" strike="noStrike">
+              <a:latin typeface="Arial"/>
+            </a:endParaRPr>
+          </a:p>
+        </p:txBody>
+      </p:sp>
+      <p:sp>
+        <p:nvSpPr>
+          <p:cNvPr id="92" name="Прямоугольник: скругленные углы 19"/>
           <p:cNvSpPr/>
           <p:nvPr/>
         </p:nvSpPr>
         <p:spPr>
           <a:xfrm>
             <a:off x="6273000" y="1252800"/>
-            <a:ext cx="2557080" cy="3642840"/>
+            <a:ext cx="2556720" cy="3642480"/>
           </a:xfrm>
           <a:prstGeom prst="roundRect">
             <a:avLst>
@@ -6465,14 +6046,14 @@
       </p:grpSpPr>
       <p:sp>
         <p:nvSpPr>
-          <p:cNvPr id="94" name="Прямоугольник со скругленными углами 3"/>
+          <p:cNvPr id="93" name="Прямоугольник со скругленными углами 3"/>
           <p:cNvSpPr/>
           <p:nvPr/>
         </p:nvSpPr>
         <p:spPr>
           <a:xfrm>
             <a:off x="0" y="0"/>
-            <a:ext cx="3396960" cy="5143320"/>
+            <a:ext cx="3396600" cy="5142960"/>
           </a:xfrm>
           <a:prstGeom prst="roundRect">
             <a:avLst>
@@ -6523,22 +6104,22 @@
               </a:rPr>
               <a:t>PIC</a:t>
             </a:r>
-            <a:endParaRPr b="0" lang="ru-RU" sz="1800" spc="-1" strike="noStrike">
-              <a:latin typeface="Arial"/>
-            </a:endParaRPr>
-          </a:p>
-        </p:txBody>
-      </p:sp>
-      <p:sp>
-        <p:nvSpPr>
-          <p:cNvPr id="95" name="TextBox 10"/>
+            <a:endParaRPr b="0" lang="en-US" sz="1800" spc="-1" strike="noStrike">
+              <a:latin typeface="Arial"/>
+            </a:endParaRPr>
+          </a:p>
+        </p:txBody>
+      </p:sp>
+      <p:sp>
+        <p:nvSpPr>
+          <p:cNvPr id="94" name="TextBox 10"/>
           <p:cNvSpPr/>
           <p:nvPr/>
         </p:nvSpPr>
         <p:spPr>
           <a:xfrm>
             <a:off x="4192560" y="3830040"/>
-            <a:ext cx="4672440" cy="329040"/>
+            <a:ext cx="4672080" cy="328680"/>
           </a:xfrm>
           <a:prstGeom prst="rect">
             <a:avLst/>
@@ -6575,22 +6156,22 @@
               </a:rPr>
               <a:t>SUBTITLE3</a:t>
             </a:r>
-            <a:endParaRPr b="0" lang="ru-RU" sz="1400" spc="-1" strike="noStrike">
-              <a:latin typeface="Arial"/>
-            </a:endParaRPr>
-          </a:p>
-        </p:txBody>
-      </p:sp>
-      <p:sp>
-        <p:nvSpPr>
-          <p:cNvPr id="96" name="TextBox 10"/>
+            <a:endParaRPr b="0" lang="en-US" sz="1400" spc="-1" strike="noStrike">
+              <a:latin typeface="Arial"/>
+            </a:endParaRPr>
+          </a:p>
+        </p:txBody>
+      </p:sp>
+      <p:sp>
+        <p:nvSpPr>
+          <p:cNvPr id="95" name="TextBox 10"/>
           <p:cNvSpPr/>
           <p:nvPr/>
         </p:nvSpPr>
         <p:spPr>
           <a:xfrm>
             <a:off x="4192560" y="4188600"/>
-            <a:ext cx="4672440" cy="713880"/>
+            <a:ext cx="4672080" cy="713520"/>
           </a:xfrm>
           <a:prstGeom prst="rect">
             <a:avLst/>
@@ -6637,22 +6218,22 @@
               </a:rPr>
               <a:t>3</a:t>
             </a:r>
-            <a:endParaRPr b="0" lang="ru-RU" sz="1100" spc="-1" strike="noStrike">
-              <a:latin typeface="Arial"/>
-            </a:endParaRPr>
-          </a:p>
-        </p:txBody>
-      </p:sp>
-      <p:sp>
-        <p:nvSpPr>
-          <p:cNvPr id="97" name="Овал 9"/>
+            <a:endParaRPr b="0" lang="en-US" sz="1100" spc="-1" strike="noStrike">
+              <a:latin typeface="Arial"/>
+            </a:endParaRPr>
+          </a:p>
+        </p:txBody>
+      </p:sp>
+      <p:sp>
+        <p:nvSpPr>
+          <p:cNvPr id="96" name="Овал 9"/>
           <p:cNvSpPr/>
           <p:nvPr/>
         </p:nvSpPr>
         <p:spPr>
           <a:xfrm>
             <a:off x="3724560" y="3830040"/>
-            <a:ext cx="403200" cy="403200"/>
+            <a:ext cx="402840" cy="402840"/>
           </a:xfrm>
           <a:prstGeom prst="ellipse">
             <a:avLst/>
@@ -6695,25 +6276,26 @@
                   <a:srgbClr val="ffffff"/>
                 </a:solidFill>
                 <a:latin typeface="Calibri"/>
+                <a:ea typeface="DejaVu Sans"/>
               </a:rPr>
               <a:t>03</a:t>
             </a:r>
-            <a:endParaRPr b="0" lang="ru-RU" sz="800" spc="-1" strike="noStrike">
-              <a:latin typeface="Arial"/>
-            </a:endParaRPr>
-          </a:p>
-        </p:txBody>
-      </p:sp>
-      <p:sp>
-        <p:nvSpPr>
-          <p:cNvPr id="98" name="TextBox 10"/>
+            <a:endParaRPr b="0" lang="en-US" sz="800" spc="-1" strike="noStrike">
+              <a:latin typeface="Arial"/>
+            </a:endParaRPr>
+          </a:p>
+        </p:txBody>
+      </p:sp>
+      <p:sp>
+        <p:nvSpPr>
+          <p:cNvPr id="97" name="TextBox 10"/>
           <p:cNvSpPr/>
           <p:nvPr/>
         </p:nvSpPr>
         <p:spPr>
           <a:xfrm>
             <a:off x="4192560" y="2571840"/>
-            <a:ext cx="4672440" cy="329040"/>
+            <a:ext cx="4672080" cy="328680"/>
           </a:xfrm>
           <a:prstGeom prst="rect">
             <a:avLst/>
@@ -6760,22 +6342,22 @@
               </a:rPr>
               <a:t>2</a:t>
             </a:r>
-            <a:endParaRPr b="0" lang="ru-RU" sz="1400" spc="-1" strike="noStrike">
-              <a:latin typeface="Arial"/>
-            </a:endParaRPr>
-          </a:p>
-        </p:txBody>
-      </p:sp>
-      <p:sp>
-        <p:nvSpPr>
-          <p:cNvPr id="99" name="TextBox 10"/>
+            <a:endParaRPr b="0" lang="en-US" sz="1400" spc="-1" strike="noStrike">
+              <a:latin typeface="Arial"/>
+            </a:endParaRPr>
+          </a:p>
+        </p:txBody>
+      </p:sp>
+      <p:sp>
+        <p:nvSpPr>
+          <p:cNvPr id="98" name="TextBox 10"/>
           <p:cNvSpPr/>
           <p:nvPr/>
         </p:nvSpPr>
         <p:spPr>
           <a:xfrm>
             <a:off x="4192560" y="2930400"/>
-            <a:ext cx="4672440" cy="713880"/>
+            <a:ext cx="4672080" cy="713520"/>
           </a:xfrm>
           <a:prstGeom prst="rect">
             <a:avLst/>
@@ -6822,22 +6404,22 @@
               </a:rPr>
               <a:t>2</a:t>
             </a:r>
-            <a:endParaRPr b="0" lang="ru-RU" sz="1100" spc="-1" strike="noStrike">
-              <a:latin typeface="Arial"/>
-            </a:endParaRPr>
-          </a:p>
-        </p:txBody>
-      </p:sp>
-      <p:sp>
-        <p:nvSpPr>
-          <p:cNvPr id="100" name="Овал 13"/>
+            <a:endParaRPr b="0" lang="en-US" sz="1100" spc="-1" strike="noStrike">
+              <a:latin typeface="Arial"/>
+            </a:endParaRPr>
+          </a:p>
+        </p:txBody>
+      </p:sp>
+      <p:sp>
+        <p:nvSpPr>
+          <p:cNvPr id="99" name="Овал 13"/>
           <p:cNvSpPr/>
           <p:nvPr/>
         </p:nvSpPr>
         <p:spPr>
           <a:xfrm>
             <a:off x="3724560" y="2571840"/>
-            <a:ext cx="403200" cy="403200"/>
+            <a:ext cx="402840" cy="402840"/>
           </a:xfrm>
           <a:prstGeom prst="ellipse">
             <a:avLst/>
@@ -6880,25 +6462,26 @@
                   <a:srgbClr val="ffffff"/>
                 </a:solidFill>
                 <a:latin typeface="Calibri"/>
+                <a:ea typeface="DejaVu Sans"/>
               </a:rPr>
               <a:t>02</a:t>
             </a:r>
-            <a:endParaRPr b="0" lang="ru-RU" sz="800" spc="-1" strike="noStrike">
-              <a:latin typeface="Arial"/>
-            </a:endParaRPr>
-          </a:p>
-        </p:txBody>
-      </p:sp>
-      <p:sp>
-        <p:nvSpPr>
-          <p:cNvPr id="101" name="TextBox 10"/>
+            <a:endParaRPr b="0" lang="en-US" sz="800" spc="-1" strike="noStrike">
+              <a:latin typeface="Arial"/>
+            </a:endParaRPr>
+          </a:p>
+        </p:txBody>
+      </p:sp>
+      <p:sp>
+        <p:nvSpPr>
+          <p:cNvPr id="100" name="TextBox 10"/>
           <p:cNvSpPr/>
           <p:nvPr/>
         </p:nvSpPr>
         <p:spPr>
           <a:xfrm>
             <a:off x="4192560" y="1311840"/>
-            <a:ext cx="4672440" cy="329040"/>
+            <a:ext cx="4672080" cy="328680"/>
           </a:xfrm>
           <a:prstGeom prst="rect">
             <a:avLst/>
@@ -6945,22 +6528,22 @@
               </a:rPr>
               <a:t>1</a:t>
             </a:r>
-            <a:endParaRPr b="0" lang="ru-RU" sz="1400" spc="-1" strike="noStrike">
-              <a:latin typeface="Arial"/>
-            </a:endParaRPr>
-          </a:p>
-        </p:txBody>
-      </p:sp>
-      <p:sp>
-        <p:nvSpPr>
-          <p:cNvPr id="102" name="TextBox 10"/>
+            <a:endParaRPr b="0" lang="en-US" sz="1400" spc="-1" strike="noStrike">
+              <a:latin typeface="Arial"/>
+            </a:endParaRPr>
+          </a:p>
+        </p:txBody>
+      </p:sp>
+      <p:sp>
+        <p:nvSpPr>
+          <p:cNvPr id="101" name="TextBox 10"/>
           <p:cNvSpPr/>
           <p:nvPr/>
         </p:nvSpPr>
         <p:spPr>
           <a:xfrm>
             <a:off x="4192560" y="1670760"/>
-            <a:ext cx="4672440" cy="713880"/>
+            <a:ext cx="4672080" cy="713520"/>
           </a:xfrm>
           <a:prstGeom prst="rect">
             <a:avLst/>
@@ -7007,22 +6590,22 @@
               </a:rPr>
               <a:t>1</a:t>
             </a:r>
-            <a:endParaRPr b="0" lang="ru-RU" sz="1100" spc="-1" strike="noStrike">
-              <a:latin typeface="Arial"/>
-            </a:endParaRPr>
-          </a:p>
-        </p:txBody>
-      </p:sp>
-      <p:sp>
-        <p:nvSpPr>
-          <p:cNvPr id="103" name="Овал 16"/>
+            <a:endParaRPr b="0" lang="en-US" sz="1100" spc="-1" strike="noStrike">
+              <a:latin typeface="Arial"/>
+            </a:endParaRPr>
+          </a:p>
+        </p:txBody>
+      </p:sp>
+      <p:sp>
+        <p:nvSpPr>
+          <p:cNvPr id="102" name="Овал 16"/>
           <p:cNvSpPr/>
           <p:nvPr/>
         </p:nvSpPr>
         <p:spPr>
           <a:xfrm>
             <a:off x="3724560" y="1311840"/>
-            <a:ext cx="403200" cy="403200"/>
+            <a:ext cx="402840" cy="402840"/>
           </a:xfrm>
           <a:prstGeom prst="ellipse">
             <a:avLst/>
@@ -7065,25 +6648,26 @@
                   <a:srgbClr val="ffffff"/>
                 </a:solidFill>
                 <a:latin typeface="Calibri"/>
+                <a:ea typeface="DejaVu Sans"/>
               </a:rPr>
               <a:t>01</a:t>
             </a:r>
-            <a:endParaRPr b="0" lang="ru-RU" sz="800" spc="-1" strike="noStrike">
-              <a:latin typeface="Arial"/>
-            </a:endParaRPr>
-          </a:p>
-        </p:txBody>
-      </p:sp>
-      <p:sp>
-        <p:nvSpPr>
-          <p:cNvPr id="104" name="TextBox 17"/>
+            <a:endParaRPr b="0" lang="en-US" sz="800" spc="-1" strike="noStrike">
+              <a:latin typeface="Arial"/>
+            </a:endParaRPr>
+          </a:p>
+        </p:txBody>
+      </p:sp>
+      <p:sp>
+        <p:nvSpPr>
+          <p:cNvPr id="103" name="TextBox 17"/>
           <p:cNvSpPr/>
           <p:nvPr/>
         </p:nvSpPr>
         <p:spPr>
           <a:xfrm>
             <a:off x="3607560" y="215280"/>
-            <a:ext cx="5375160" cy="909720"/>
+            <a:ext cx="5374800" cy="909360"/>
           </a:xfrm>
           <a:prstGeom prst="rect">
             <a:avLst/>
@@ -7116,10 +6700,11 @@
                   <a:srgbClr val="ffffff"/>
                 </a:solidFill>
                 <a:latin typeface="Arial"/>
+                <a:ea typeface="DejaVu Sans"/>
               </a:rPr>
               <a:t>TITLE</a:t>
             </a:r>
-            <a:endParaRPr b="0" lang="ru-RU" sz="2200" spc="-1" strike="noStrike">
+            <a:endParaRPr b="0" lang="en-US" sz="2200" spc="-1" strike="noStrike">
               <a:latin typeface="Arial"/>
             </a:endParaRPr>
           </a:p>
@@ -7164,14 +6749,14 @@
       </p:grpSpPr>
       <p:sp>
         <p:nvSpPr>
-          <p:cNvPr id="105" name="Прямоугольник: скругленные углы 22"/>
+          <p:cNvPr id="104" name="Прямоугольник: скругленные углы 22"/>
           <p:cNvSpPr/>
           <p:nvPr/>
         </p:nvSpPr>
         <p:spPr>
           <a:xfrm>
             <a:off x="3417120" y="1051560"/>
-            <a:ext cx="5047920" cy="841680"/>
+            <a:ext cx="5047560" cy="841320"/>
           </a:xfrm>
           <a:prstGeom prst="roundRect">
             <a:avLst>
@@ -7202,14 +6787,14 @@
       </p:sp>
       <p:sp>
         <p:nvSpPr>
-          <p:cNvPr id="106" name="Прямоугольник: скругленные углы 28"/>
+          <p:cNvPr id="105" name="Прямоугольник: скругленные углы 28"/>
           <p:cNvSpPr/>
           <p:nvPr/>
         </p:nvSpPr>
         <p:spPr>
           <a:xfrm>
             <a:off x="3417120" y="2451960"/>
-            <a:ext cx="5047920" cy="841680"/>
+            <a:ext cx="5047560" cy="841320"/>
           </a:xfrm>
           <a:prstGeom prst="roundRect">
             <a:avLst>
@@ -7240,14 +6825,14 @@
       </p:sp>
       <p:sp>
         <p:nvSpPr>
-          <p:cNvPr id="107" name="Прямоугольник: скругленные углы 32"/>
+          <p:cNvPr id="106" name="Прямоугольник: скругленные углы 32"/>
           <p:cNvSpPr/>
           <p:nvPr/>
         </p:nvSpPr>
         <p:spPr>
           <a:xfrm>
             <a:off x="3417120" y="3849840"/>
-            <a:ext cx="5047920" cy="841680"/>
+            <a:ext cx="5047560" cy="841320"/>
           </a:xfrm>
           <a:prstGeom prst="roundRect">
             <a:avLst>
@@ -7278,14 +6863,14 @@
       </p:sp>
       <p:sp>
         <p:nvSpPr>
-          <p:cNvPr id="108" name="TextBox 10"/>
+          <p:cNvPr id="107" name="TextBox 10"/>
           <p:cNvSpPr/>
           <p:nvPr/>
         </p:nvSpPr>
         <p:spPr>
           <a:xfrm>
             <a:off x="3821760" y="1115280"/>
-            <a:ext cx="4483800" cy="713880"/>
+            <a:ext cx="4483440" cy="713520"/>
           </a:xfrm>
           <a:prstGeom prst="rect">
             <a:avLst/>
@@ -7332,15 +6917,15 @@
               </a:rPr>
               <a:t>1</a:t>
             </a:r>
-            <a:endParaRPr b="0" lang="ru-RU" sz="1100" spc="-1" strike="noStrike">
-              <a:latin typeface="Arial"/>
-            </a:endParaRPr>
-          </a:p>
-        </p:txBody>
-      </p:sp>
-      <p:sp>
-        <p:nvSpPr>
-          <p:cNvPr id="109" name="Прямая соединительная линия 4"/>
+            <a:endParaRPr b="0" lang="en-US" sz="1100" spc="-1" strike="noStrike">
+              <a:latin typeface="Arial"/>
+            </a:endParaRPr>
+          </a:p>
+        </p:txBody>
+      </p:sp>
+      <p:sp>
+        <p:nvSpPr>
+          <p:cNvPr id="108" name="Прямая соединительная линия 4"/>
           <p:cNvSpPr/>
           <p:nvPr/>
         </p:nvSpPr>
@@ -7373,14 +6958,14 @@
       </p:sp>
       <p:sp>
         <p:nvSpPr>
-          <p:cNvPr id="110" name="Прямоугольник: скругленные углы 19"/>
+          <p:cNvPr id="109" name="Прямоугольник: скругленные углы 19"/>
           <p:cNvSpPr/>
           <p:nvPr/>
         </p:nvSpPr>
         <p:spPr>
           <a:xfrm>
             <a:off x="1135800" y="1033200"/>
-            <a:ext cx="2642760" cy="880920"/>
+            <a:ext cx="2642400" cy="880560"/>
           </a:xfrm>
           <a:prstGeom prst="roundRect">
             <a:avLst>
@@ -7411,14 +6996,14 @@
       </p:sp>
       <p:sp>
         <p:nvSpPr>
-          <p:cNvPr id="111" name="TextBox 10"/>
+          <p:cNvPr id="110" name="TextBox 10"/>
           <p:cNvSpPr/>
           <p:nvPr/>
         </p:nvSpPr>
         <p:spPr>
           <a:xfrm>
             <a:off x="1164600" y="1033200"/>
-            <a:ext cx="2546280" cy="880920"/>
+            <a:ext cx="2545920" cy="880560"/>
           </a:xfrm>
           <a:prstGeom prst="rect">
             <a:avLst/>
@@ -7465,22 +7050,22 @@
               </a:rPr>
               <a:t>1</a:t>
             </a:r>
-            <a:endParaRPr b="0" lang="ru-RU" sz="1400" spc="-1" strike="noStrike">
-              <a:latin typeface="Arial"/>
-            </a:endParaRPr>
-          </a:p>
-        </p:txBody>
-      </p:sp>
-      <p:sp>
-        <p:nvSpPr>
-          <p:cNvPr id="112" name="TextBox 10"/>
+            <a:endParaRPr b="0" lang="en-US" sz="1400" spc="-1" strike="noStrike">
+              <a:latin typeface="Arial"/>
+            </a:endParaRPr>
+          </a:p>
+        </p:txBody>
+      </p:sp>
+      <p:sp>
+        <p:nvSpPr>
+          <p:cNvPr id="111" name="TextBox 10"/>
           <p:cNvSpPr/>
           <p:nvPr/>
         </p:nvSpPr>
         <p:spPr>
           <a:xfrm>
             <a:off x="3821760" y="2515680"/>
-            <a:ext cx="4483800" cy="713880"/>
+            <a:ext cx="4483440" cy="713520"/>
           </a:xfrm>
           <a:prstGeom prst="rect">
             <a:avLst/>
@@ -7527,22 +7112,22 @@
               </a:rPr>
               <a:t>2</a:t>
             </a:r>
-            <a:endParaRPr b="0" lang="ru-RU" sz="1100" spc="-1" strike="noStrike">
-              <a:latin typeface="Arial"/>
-            </a:endParaRPr>
-          </a:p>
-        </p:txBody>
-      </p:sp>
-      <p:sp>
-        <p:nvSpPr>
-          <p:cNvPr id="113" name="Прямоугольник: скругленные углы 26"/>
+            <a:endParaRPr b="0" lang="en-US" sz="1100" spc="-1" strike="noStrike">
+              <a:latin typeface="Arial"/>
+            </a:endParaRPr>
+          </a:p>
+        </p:txBody>
+      </p:sp>
+      <p:sp>
+        <p:nvSpPr>
+          <p:cNvPr id="112" name="Прямоугольник: скругленные углы 26"/>
           <p:cNvSpPr/>
           <p:nvPr/>
         </p:nvSpPr>
         <p:spPr>
           <a:xfrm>
             <a:off x="1135800" y="2433600"/>
-            <a:ext cx="2642760" cy="880920"/>
+            <a:ext cx="2642400" cy="880560"/>
           </a:xfrm>
           <a:prstGeom prst="roundRect">
             <a:avLst>
@@ -7573,14 +7158,14 @@
       </p:sp>
       <p:sp>
         <p:nvSpPr>
-          <p:cNvPr id="114" name="TextBox 10"/>
+          <p:cNvPr id="113" name="TextBox 10"/>
           <p:cNvSpPr/>
           <p:nvPr/>
         </p:nvSpPr>
         <p:spPr>
           <a:xfrm>
             <a:off x="1164600" y="2433600"/>
-            <a:ext cx="2546280" cy="880920"/>
+            <a:ext cx="2545920" cy="880560"/>
           </a:xfrm>
           <a:prstGeom prst="rect">
             <a:avLst/>
@@ -7627,22 +7212,22 @@
               </a:rPr>
               <a:t>2</a:t>
             </a:r>
-            <a:endParaRPr b="0" lang="ru-RU" sz="1400" spc="-1" strike="noStrike">
-              <a:latin typeface="Arial"/>
-            </a:endParaRPr>
-          </a:p>
-        </p:txBody>
-      </p:sp>
-      <p:sp>
-        <p:nvSpPr>
-          <p:cNvPr id="115" name="TextBox 10"/>
+            <a:endParaRPr b="0" lang="en-US" sz="1400" spc="-1" strike="noStrike">
+              <a:latin typeface="Arial"/>
+            </a:endParaRPr>
+          </a:p>
+        </p:txBody>
+      </p:sp>
+      <p:sp>
+        <p:nvSpPr>
+          <p:cNvPr id="114" name="TextBox 10"/>
           <p:cNvSpPr/>
           <p:nvPr/>
         </p:nvSpPr>
         <p:spPr>
           <a:xfrm>
             <a:off x="3821760" y="3913560"/>
-            <a:ext cx="4483800" cy="713880"/>
+            <a:ext cx="4483440" cy="713520"/>
           </a:xfrm>
           <a:prstGeom prst="rect">
             <a:avLst/>
@@ -7689,22 +7274,22 @@
               </a:rPr>
               <a:t>3</a:t>
             </a:r>
-            <a:endParaRPr b="0" lang="ru-RU" sz="1100" spc="-1" strike="noStrike">
-              <a:latin typeface="Arial"/>
-            </a:endParaRPr>
-          </a:p>
-        </p:txBody>
-      </p:sp>
-      <p:sp>
-        <p:nvSpPr>
-          <p:cNvPr id="116" name="Прямоугольник: скругленные углы 30"/>
+            <a:endParaRPr b="0" lang="en-US" sz="1100" spc="-1" strike="noStrike">
+              <a:latin typeface="Arial"/>
+            </a:endParaRPr>
+          </a:p>
+        </p:txBody>
+      </p:sp>
+      <p:sp>
+        <p:nvSpPr>
+          <p:cNvPr id="115" name="Прямоугольник: скругленные углы 30"/>
           <p:cNvSpPr/>
           <p:nvPr/>
         </p:nvSpPr>
         <p:spPr>
           <a:xfrm>
             <a:off x="1135800" y="3831480"/>
-            <a:ext cx="2642760" cy="880920"/>
+            <a:ext cx="2642400" cy="880560"/>
           </a:xfrm>
           <a:prstGeom prst="roundRect">
             <a:avLst>
@@ -7735,14 +7320,14 @@
       </p:sp>
       <p:sp>
         <p:nvSpPr>
-          <p:cNvPr id="117" name="TextBox 10"/>
+          <p:cNvPr id="116" name="TextBox 10"/>
           <p:cNvSpPr/>
           <p:nvPr/>
         </p:nvSpPr>
         <p:spPr>
           <a:xfrm>
             <a:off x="1164600" y="3831480"/>
-            <a:ext cx="2546280" cy="880920"/>
+            <a:ext cx="2545920" cy="880560"/>
           </a:xfrm>
           <a:prstGeom prst="rect">
             <a:avLst/>
@@ -7789,22 +7374,22 @@
               </a:rPr>
               <a:t>3</a:t>
             </a:r>
-            <a:endParaRPr b="0" lang="ru-RU" sz="1400" spc="-1" strike="noStrike">
-              <a:latin typeface="Arial"/>
-            </a:endParaRPr>
-          </a:p>
-        </p:txBody>
-      </p:sp>
-      <p:sp>
-        <p:nvSpPr>
-          <p:cNvPr id="118" name="Овал 5"/>
+            <a:endParaRPr b="0" lang="en-US" sz="1400" spc="-1" strike="noStrike">
+              <a:latin typeface="Arial"/>
+            </a:endParaRPr>
+          </a:p>
+        </p:txBody>
+      </p:sp>
+      <p:sp>
+        <p:nvSpPr>
+          <p:cNvPr id="117" name="Овал 5"/>
           <p:cNvSpPr/>
           <p:nvPr/>
         </p:nvSpPr>
         <p:spPr>
           <a:xfrm>
             <a:off x="675360" y="1365840"/>
-            <a:ext cx="221040" cy="221040"/>
+            <a:ext cx="220680" cy="220680"/>
           </a:xfrm>
           <a:prstGeom prst="ellipse">
             <a:avLst/>
@@ -7838,14 +7423,14 @@
       </p:sp>
       <p:sp>
         <p:nvSpPr>
-          <p:cNvPr id="119" name="Овал 33"/>
+          <p:cNvPr id="118" name="Овал 33"/>
           <p:cNvSpPr/>
           <p:nvPr/>
         </p:nvSpPr>
         <p:spPr>
           <a:xfrm>
             <a:off x="675360" y="2728080"/>
-            <a:ext cx="221040" cy="221040"/>
+            <a:ext cx="220680" cy="220680"/>
           </a:xfrm>
           <a:prstGeom prst="ellipse">
             <a:avLst/>
@@ -7879,14 +7464,14 @@
       </p:sp>
       <p:sp>
         <p:nvSpPr>
-          <p:cNvPr id="120" name="Овал 34"/>
+          <p:cNvPr id="119" name="Овал 34"/>
           <p:cNvSpPr/>
           <p:nvPr/>
         </p:nvSpPr>
         <p:spPr>
           <a:xfrm>
             <a:off x="671760" y="4156200"/>
-            <a:ext cx="221040" cy="221040"/>
+            <a:ext cx="220680" cy="220680"/>
           </a:xfrm>
           <a:prstGeom prst="ellipse">
             <a:avLst/>
@@ -7920,14 +7505,14 @@
       </p:sp>
       <p:sp>
         <p:nvSpPr>
-          <p:cNvPr id="121" name="TextBox 20"/>
+          <p:cNvPr id="120" name="TextBox 20"/>
           <p:cNvSpPr/>
           <p:nvPr/>
         </p:nvSpPr>
         <p:spPr>
           <a:xfrm>
             <a:off x="381600" y="271080"/>
-            <a:ext cx="8465760" cy="480960"/>
+            <a:ext cx="8465400" cy="480600"/>
           </a:xfrm>
           <a:prstGeom prst="rect">
             <a:avLst/>
@@ -7960,10 +7545,11 @@
                   <a:srgbClr val="ffffff"/>
                 </a:solidFill>
                 <a:latin typeface="Arial"/>
+                <a:ea typeface="DejaVu Sans"/>
               </a:rPr>
               <a:t>TITLE</a:t>
             </a:r>
-            <a:endParaRPr b="0" lang="ru-RU" sz="2200" spc="-1" strike="noStrike">
+            <a:endParaRPr b="0" lang="en-US" sz="2200" spc="-1" strike="noStrike">
               <a:latin typeface="Arial"/>
             </a:endParaRPr>
           </a:p>
@@ -8008,14 +7594,14 @@
       </p:grpSpPr>
       <p:sp>
         <p:nvSpPr>
-          <p:cNvPr id="122" name="Прямоугольник со скругленными углами 3"/>
+          <p:cNvPr id="121" name="Прямоугольник со скругленными углами 3"/>
           <p:cNvSpPr/>
           <p:nvPr/>
         </p:nvSpPr>
         <p:spPr>
           <a:xfrm>
             <a:off x="186840" y="185400"/>
-            <a:ext cx="8770320" cy="4758120"/>
+            <a:ext cx="8769960" cy="4757760"/>
           </a:xfrm>
           <a:prstGeom prst="roundRect">
             <a:avLst>
@@ -8046,14 +7632,14 @@
       </p:sp>
       <p:sp>
         <p:nvSpPr>
-          <p:cNvPr id="123" name="Прямоугольник 10"/>
+          <p:cNvPr id="122" name="Прямоугольник 10"/>
           <p:cNvSpPr/>
           <p:nvPr/>
         </p:nvSpPr>
         <p:spPr>
           <a:xfrm>
             <a:off x="460080" y="658080"/>
-            <a:ext cx="8469000" cy="3306960"/>
+            <a:ext cx="8468640" cy="3306600"/>
           </a:xfrm>
           <a:prstGeom prst="rect">
             <a:avLst/>
@@ -8090,7 +7676,7 @@
               </a:rPr>
               <a:t>TITLE</a:t>
             </a:r>
-            <a:endParaRPr b="0" lang="ru-RU" sz="5400" spc="-1" strike="noStrike">
+            <a:endParaRPr b="0" lang="en-US" sz="5400" spc="-1" strike="noStrike">
               <a:latin typeface="Arial"/>
             </a:endParaRPr>
           </a:p>
